--- a/docs/decks/LedgeRX-UAF-Earn-Process-Burn-Sequence.pptx
+++ b/docs/decks/LedgeRX-UAF-Earn-Process-Burn-Sequence.pptx
@@ -1099,7 +1099,7 @@
                 <a:ea typeface="Calibri" pitchFamily="34" charset="-122"/>
                 <a:cs typeface="Calibri" pitchFamily="34" charset="-120"/>
               </a:rPr>
-              <a:t>DEMO CASE</a:t>
+              <a:t>DEMO CASE · READABLE SEQUENCE</a:t>
             </a:r>
             <a:endParaRPr lang="en-US" sz="1400" dirty="0"/>
           </a:p>
@@ -1114,7 +1114,7 @@
         <p:spPr>
           <a:xfrm>
             <a:off x="640080" y="2286000"/>
-            <a:ext cx="10972800" cy="1188720"/>
+            <a:ext cx="10972800" cy="1280160"/>
           </a:xfrm>
           <a:prstGeom prst="rect">
             <a:avLst/>
@@ -1155,7 +1155,7 @@
                 <a:ea typeface="Calibri" pitchFamily="34" charset="-122"/>
                 <a:cs typeface="Calibri" pitchFamily="34" charset="-120"/>
               </a:rPr>
-              <a:t>UA Finance CC customer transaction</a:t>
+              <a:t>UA Finance CC — HKD 500 → 5 LP</a:t>
             </a:r>
             <a:endParaRPr lang="en-US" sz="3200" dirty="0"/>
           </a:p>
@@ -1169,8 +1169,8 @@
         </p:nvSpPr>
         <p:spPr>
           <a:xfrm>
-            <a:off x="640080" y="3749040"/>
-            <a:ext cx="10972800" cy="731520"/>
+            <a:off x="640080" y="3840480"/>
+            <a:ext cx="10972800" cy="822960"/>
           </a:xfrm>
           <a:prstGeom prst="rect">
             <a:avLst/>
@@ -1186,7 +1186,7 @@
               <a:buNone/>
             </a:pPr>
             <a:r>
-              <a:rPr lang="en-US" sz="1600" dirty="0">
+              <a:rPr lang="en-US" sz="1800" dirty="0">
                 <a:solidFill>
                   <a:srgbClr val="94A3B8"/>
                 </a:solidFill>
@@ -1194,16 +1194,16 @@
                 <a:ea typeface="Calibri" pitchFamily="34" charset="-122"/>
                 <a:cs typeface="Calibri" pitchFamily="34" charset="-120"/>
               </a:rPr>
-              <a:t>HKD 500 grocery (MCC 5411) → Brain RATE 1% → 5 LP earn</a:t>
-            </a:r>
-            <a:endParaRPr lang="en-US" sz="1600" dirty="0"/>
+              <a:t>Pay → xapi → SDK → Door → Brain (500×1%) → Books (+5)</a:t>
+            </a:r>
+            <a:endParaRPr lang="en-US" sz="1800" dirty="0"/>
           </a:p>
           <a:p>
             <a:pPr indent="0" marL="0">
               <a:buNone/>
             </a:pPr>
             <a:r>
-              <a:rPr lang="en-US" sz="1600" dirty="0">
+              <a:rPr lang="en-US" sz="1800" dirty="0">
                 <a:solidFill>
                   <a:srgbClr val="94A3B8"/>
                 </a:solidFill>
@@ -1211,9 +1211,9 @@
                 <a:ea typeface="Calibri" pitchFamily="34" charset="-122"/>
                 <a:cs typeface="Calibri" pitchFamily="34" charset="-120"/>
               </a:rPr>
-              <a:t>Later redeem → 5 LP burn · SA V2–style sequence</a:t>
-            </a:r>
-            <a:endParaRPr lang="en-US" sz="1600" dirty="0"/>
+              <a:t>Later redeem → Burn (−5) → E-Coupon</a:t>
+            </a:r>
+            <a:endParaRPr lang="en-US" sz="1800" dirty="0"/>
           </a:p>
         </p:txBody>
       </p:sp>
@@ -1257,7 +1257,7 @@
             <a:avLst/>
           </a:prstGeom>
           <a:solidFill>
-            <a:srgbClr val="070B14"/>
+            <a:srgbClr val="0B1220"/>
           </a:solidFill>
           <a:ln/>
         </p:spPr>
@@ -1278,8 +1278,8 @@
         </p:blipFill>
         <p:spPr>
           <a:xfrm>
-            <a:off x="182880" y="91440"/>
-            <a:ext cx="11795760" cy="6675120"/>
+            <a:off x="1280160" y="137160"/>
+            <a:ext cx="9601200" cy="6583680"/>
           </a:xfrm>
           <a:prstGeom prst="rect">
             <a:avLst/>
@@ -1339,7 +1339,7 @@
         </p:nvSpPr>
         <p:spPr>
           <a:xfrm>
-            <a:off x="502920" y="365760"/>
+            <a:off x="548640" y="411480"/>
             <a:ext cx="10972800" cy="457200"/>
           </a:xfrm>
           <a:prstGeom prst="rect">
@@ -1356,7 +1356,7 @@
               <a:buNone/>
             </a:pPr>
             <a:r>
-              <a:rPr lang="en-US" sz="2600" b="1" dirty="0">
+              <a:rPr lang="en-US" sz="2800" b="1" dirty="0">
                 <a:solidFill>
                   <a:srgbClr val="0B1220"/>
                 </a:solidFill>
@@ -1364,9 +1364,9 @@
                 <a:ea typeface="Calibri" pitchFamily="34" charset="-122"/>
                 <a:cs typeface="Calibri" pitchFamily="34" charset="-120"/>
               </a:rPr>
-              <a:t>What the numbers mean</a:t>
-            </a:r>
-            <a:endParaRPr lang="en-US" sz="2600" dirty="0"/>
+              <a:t>One glance — the math</a:t>
+            </a:r>
+            <a:endParaRPr lang="en-US" sz="2800" dirty="0"/>
           </a:p>
         </p:txBody>
       </p:sp>
@@ -1378,12 +1378,112 @@
         </p:nvSpPr>
         <p:spPr>
           <a:xfrm>
-            <a:off x="502920" y="1143000"/>
-            <a:ext cx="2743200" cy="4846320"/>
+            <a:off x="548640" y="1188720"/>
+            <a:ext cx="11064240" cy="1828800"/>
           </a:xfrm>
           <a:prstGeom prst="roundRect">
             <a:avLst>
-              <a:gd name="adj" fmla="val 3333"/>
+              <a:gd name="adj" fmla="val 6000"/>
+            </a:avLst>
+          </a:prstGeom>
+          <a:solidFill>
+            <a:srgbClr val="0C2340"/>
+          </a:solidFill>
+          <a:ln/>
+        </p:spPr>
+      </p:sp>
+      <p:sp>
+        <p:nvSpPr>
+          <p:cNvPr id="5" name="Text 3"/>
+          <p:cNvSpPr/>
+          <p:nvPr/>
+        </p:nvSpPr>
+        <p:spPr>
+          <a:xfrm>
+            <a:off x="548640" y="1691640"/>
+            <a:ext cx="11064240" cy="640080"/>
+          </a:xfrm>
+          <a:prstGeom prst="rect">
+            <a:avLst/>
+          </a:prstGeom>
+          <a:noFill/>
+          <a:ln/>
+        </p:spPr>
+        <p:txBody>
+          <a:bodyPr wrap="square" lIns="0" tIns="0" rIns="0" bIns="0" rtlCol="0" anchor="ctr"/>
+          <a:lstStyle/>
+          <a:p>
+            <a:pPr algn="ctr" indent="0" marL="0">
+              <a:buNone/>
+            </a:pPr>
+            <a:r>
+              <a:rPr lang="en-US" sz="3600" b="1" dirty="0">
+                <a:solidFill>
+                  <a:srgbClr val="FDE68A"/>
+                </a:solidFill>
+                <a:latin typeface="Calibri" pitchFamily="34" charset="0"/>
+                <a:ea typeface="Calibri" pitchFamily="34" charset="-122"/>
+                <a:cs typeface="Calibri" pitchFamily="34" charset="-120"/>
+              </a:rPr>
+              <a:t>500 HKD  ×  1%  =  5 LP</a:t>
+            </a:r>
+            <a:endParaRPr lang="en-US" sz="3600" dirty="0"/>
+          </a:p>
+        </p:txBody>
+      </p:sp>
+      <p:sp>
+        <p:nvSpPr>
+          <p:cNvPr id="6" name="Text 4"/>
+          <p:cNvSpPr/>
+          <p:nvPr/>
+        </p:nvSpPr>
+        <p:spPr>
+          <a:xfrm>
+            <a:off x="548640" y="2377440"/>
+            <a:ext cx="11064240" cy="365760"/>
+          </a:xfrm>
+          <a:prstGeom prst="rect">
+            <a:avLst/>
+          </a:prstGeom>
+          <a:noFill/>
+          <a:ln/>
+        </p:spPr>
+        <p:txBody>
+          <a:bodyPr wrap="square" lIns="0" tIns="0" rIns="0" bIns="0" rtlCol="0" anchor="ctr"/>
+          <a:lstStyle/>
+          <a:p>
+            <a:pPr algn="ctr" indent="0" marL="0">
+              <a:buNone/>
+            </a:pPr>
+            <a:r>
+              <a:rPr lang="en-US" sz="1600" dirty="0">
+                <a:solidFill>
+                  <a:srgbClr val="94A3B8"/>
+                </a:solidFill>
+                <a:latin typeface="Calibri" pitchFamily="34" charset="0"/>
+                <a:ea typeface="Calibri" pitchFamily="34" charset="-122"/>
+                <a:cs typeface="Calibri" pitchFamily="34" charset="-120"/>
+              </a:rPr>
+              <a:t>Rule CC_EARN_MCC_5411  ·  RATE 0.01  ·  MCC 5411 grocery</a:t>
+            </a:r>
+            <a:endParaRPr lang="en-US" sz="1600" dirty="0"/>
+          </a:p>
+        </p:txBody>
+      </p:sp>
+      <p:sp>
+        <p:nvSpPr>
+          <p:cNvPr id="7" name="Shape 5"/>
+          <p:cNvSpPr/>
+          <p:nvPr/>
+        </p:nvSpPr>
+        <p:spPr>
+          <a:xfrm>
+            <a:off x="548640" y="3383280"/>
+            <a:ext cx="2148840" cy="2651760"/>
+          </a:xfrm>
+          <a:prstGeom prst="roundRect">
+            <a:avLst>
+              <a:gd name="adj" fmla="val 4255"/>
             </a:avLst>
           </a:prstGeom>
           <a:solidFill>
@@ -1401,14 +1501,14 @@
       </p:sp>
       <p:sp>
         <p:nvSpPr>
-          <p:cNvPr id="5" name="Text 3"/>
-          <p:cNvSpPr/>
-          <p:nvPr/>
-        </p:nvSpPr>
-        <p:spPr>
-          <a:xfrm>
-            <a:off x="685800" y="1417320"/>
-            <a:ext cx="2377440" cy="457200"/>
+          <p:cNvPr id="8" name="Text 6"/>
+          <p:cNvSpPr/>
+          <p:nvPr/>
+        </p:nvSpPr>
+        <p:spPr>
+          <a:xfrm>
+            <a:off x="685800" y="3657600"/>
+            <a:ext cx="1874520" cy="640080"/>
           </a:xfrm>
           <a:prstGeom prst="rect">
             <a:avLst/>
@@ -1424,7 +1524,7 @@
               <a:buNone/>
             </a:pPr>
             <a:r>
-              <a:rPr lang="en-US" sz="1600" b="1" dirty="0">
+              <a:rPr lang="en-US" sz="1500" b="1" dirty="0">
                 <a:solidFill>
                   <a:srgbClr val="0F766E"/>
                 </a:solidFill>
@@ -1432,22 +1532,22 @@
                 <a:ea typeface="Calibri" pitchFamily="34" charset="-122"/>
                 <a:cs typeface="Calibri" pitchFamily="34" charset="-120"/>
               </a:rPr>
-              <a:t>Input</a:t>
-            </a:r>
-            <a:endParaRPr lang="en-US" sz="1600" dirty="0"/>
-          </a:p>
-        </p:txBody>
-      </p:sp>
-      <p:sp>
-        <p:nvSpPr>
-          <p:cNvPr id="6" name="Text 4"/>
-          <p:cNvSpPr/>
-          <p:nvPr/>
-        </p:nvSpPr>
-        <p:spPr>
-          <a:xfrm>
-            <a:off x="685800" y="2103120"/>
-            <a:ext cx="2377440" cy="3566160"/>
+              <a:t>1–2 Come in</a:t>
+            </a:r>
+            <a:endParaRPr lang="en-US" sz="1500" dirty="0"/>
+          </a:p>
+        </p:txBody>
+      </p:sp>
+      <p:sp>
+        <p:nvSpPr>
+          <p:cNvPr id="9" name="Text 7"/>
+          <p:cNvSpPr/>
+          <p:nvPr/>
+        </p:nvSpPr>
+        <p:spPr>
+          <a:xfrm>
+            <a:off x="685800" y="4434840"/>
+            <a:ext cx="1874520" cy="1280160"/>
           </a:xfrm>
           <a:prstGeom prst="rect">
             <a:avLst/>
@@ -1471,7 +1571,7 @@
                 <a:ea typeface="Calibri" pitchFamily="34" charset="-122"/>
                 <a:cs typeface="Calibri" pitchFamily="34" charset="-120"/>
               </a:rPr>
-              <a:t>amount = 500 HKD</a:t>
+              <a:t>Customer pays</a:t>
             </a:r>
             <a:endParaRPr lang="en-US" sz="1400" dirty="0"/>
           </a:p>
@@ -1488,10 +1588,100 @@
                 <a:ea typeface="Calibri" pitchFamily="34" charset="-122"/>
                 <a:cs typeface="Calibri" pitchFamily="34" charset="-120"/>
               </a:rPr>
-              <a:t>mcc = 5411</a:t>
+              <a:t>Channel → cc-xapi</a:t>
             </a:r>
             <a:endParaRPr lang="en-US" sz="1400" dirty="0"/>
           </a:p>
+        </p:txBody>
+      </p:sp>
+      <p:sp>
+        <p:nvSpPr>
+          <p:cNvPr id="10" name="Shape 8"/>
+          <p:cNvSpPr/>
+          <p:nvPr/>
+        </p:nvSpPr>
+        <p:spPr>
+          <a:xfrm>
+            <a:off x="2834640" y="3383280"/>
+            <a:ext cx="2148840" cy="2651760"/>
+          </a:xfrm>
+          <a:prstGeom prst="roundRect">
+            <a:avLst>
+              <a:gd name="adj" fmla="val 4255"/>
+            </a:avLst>
+          </a:prstGeom>
+          <a:solidFill>
+            <a:srgbClr val="FFFFFF"/>
+          </a:solidFill>
+          <a:ln/>
+          <a:effectLst>
+            <a:outerShdw sx="100000" sy="100000" kx="0" ky="0" algn="bl" rotWithShape="0" blurRad="101600" dist="25400" dir="5400000">
+              <a:srgbClr val="0B1220">
+                <a:alpha val="6000"/>
+              </a:srgbClr>
+            </a:outerShdw>
+          </a:effectLst>
+        </p:spPr>
+      </p:sp>
+      <p:sp>
+        <p:nvSpPr>
+          <p:cNvPr id="11" name="Text 9"/>
+          <p:cNvSpPr/>
+          <p:nvPr/>
+        </p:nvSpPr>
+        <p:spPr>
+          <a:xfrm>
+            <a:off x="2971800" y="3657600"/>
+            <a:ext cx="1874520" cy="640080"/>
+          </a:xfrm>
+          <a:prstGeom prst="rect">
+            <a:avLst/>
+          </a:prstGeom>
+          <a:noFill/>
+          <a:ln/>
+        </p:spPr>
+        <p:txBody>
+          <a:bodyPr wrap="square" lIns="0" tIns="0" rIns="0" bIns="0" rtlCol="0" anchor="ctr"/>
+          <a:lstStyle/>
+          <a:p>
+            <a:pPr indent="0" marL="0">
+              <a:buNone/>
+            </a:pPr>
+            <a:r>
+              <a:rPr lang="en-US" sz="1500" b="1" dirty="0">
+                <a:solidFill>
+                  <a:srgbClr val="0F766E"/>
+                </a:solidFill>
+                <a:latin typeface="Calibri" pitchFamily="34" charset="0"/>
+                <a:ea typeface="Calibri" pitchFamily="34" charset="-122"/>
+                <a:cs typeface="Calibri" pitchFamily="34" charset="-120"/>
+              </a:rPr>
+              <a:t>3–4 Enter engine</a:t>
+            </a:r>
+            <a:endParaRPr lang="en-US" sz="1500" dirty="0"/>
+          </a:p>
+        </p:txBody>
+      </p:sp>
+      <p:sp>
+        <p:nvSpPr>
+          <p:cNvPr id="12" name="Text 10"/>
+          <p:cNvSpPr/>
+          <p:nvPr/>
+        </p:nvSpPr>
+        <p:spPr>
+          <a:xfrm>
+            <a:off x="2971800" y="4434840"/>
+            <a:ext cx="1874520" cy="1280160"/>
+          </a:xfrm>
+          <a:prstGeom prst="rect">
+            <a:avLst/>
+          </a:prstGeom>
+          <a:noFill/>
+          <a:ln/>
+        </p:spPr>
+        <p:txBody>
+          <a:bodyPr wrap="square" lIns="0" tIns="0" rIns="0" bIns="0" rtlCol="0" anchor="ctr"/>
+          <a:lstStyle/>
           <a:p>
             <a:pPr indent="0" marL="0">
               <a:buNone/>
@@ -1505,7 +1695,7 @@
                 <a:ea typeface="Calibri" pitchFamily="34" charset="-122"/>
                 <a:cs typeface="Calibri" pitchFamily="34" charset="-120"/>
               </a:rPr>
-              <a:t>eventType = PURCHASE</a:t>
+              <a:t>SDK.ingestEvent</a:t>
             </a:r>
             <a:endParaRPr lang="en-US" sz="1400" dirty="0"/>
           </a:p>
@@ -1522,10 +1712,100 @@
                 <a:ea typeface="Calibri" pitchFamily="34" charset="-122"/>
                 <a:cs typeface="Calibri" pitchFamily="34" charset="-120"/>
               </a:rPr>
-              <a:t>ownerId = 01A…</a:t>
+              <a:t>Door accepts</a:t>
             </a:r>
             <a:endParaRPr lang="en-US" sz="1400" dirty="0"/>
           </a:p>
+        </p:txBody>
+      </p:sp>
+      <p:sp>
+        <p:nvSpPr>
+          <p:cNvPr id="13" name="Shape 11"/>
+          <p:cNvSpPr/>
+          <p:nvPr/>
+        </p:nvSpPr>
+        <p:spPr>
+          <a:xfrm>
+            <a:off x="5120640" y="3383280"/>
+            <a:ext cx="2148840" cy="2651760"/>
+          </a:xfrm>
+          <a:prstGeom prst="roundRect">
+            <a:avLst>
+              <a:gd name="adj" fmla="val 4255"/>
+            </a:avLst>
+          </a:prstGeom>
+          <a:solidFill>
+            <a:srgbClr val="FFFFFF"/>
+          </a:solidFill>
+          <a:ln/>
+          <a:effectLst>
+            <a:outerShdw sx="100000" sy="100000" kx="0" ky="0" algn="bl" rotWithShape="0" blurRad="101600" dist="25400" dir="5400000">
+              <a:srgbClr val="0B1220">
+                <a:alpha val="6000"/>
+              </a:srgbClr>
+            </a:outerShdw>
+          </a:effectLst>
+        </p:spPr>
+      </p:sp>
+      <p:sp>
+        <p:nvSpPr>
+          <p:cNvPr id="14" name="Text 12"/>
+          <p:cNvSpPr/>
+          <p:nvPr/>
+        </p:nvSpPr>
+        <p:spPr>
+          <a:xfrm>
+            <a:off x="5257800" y="3657600"/>
+            <a:ext cx="1874520" cy="640080"/>
+          </a:xfrm>
+          <a:prstGeom prst="rect">
+            <a:avLst/>
+          </a:prstGeom>
+          <a:noFill/>
+          <a:ln/>
+        </p:spPr>
+        <p:txBody>
+          <a:bodyPr wrap="square" lIns="0" tIns="0" rIns="0" bIns="0" rtlCol="0" anchor="ctr"/>
+          <a:lstStyle/>
+          <a:p>
+            <a:pPr indent="0" marL="0">
+              <a:buNone/>
+            </a:pPr>
+            <a:r>
+              <a:rPr lang="en-US" sz="1500" b="1" dirty="0">
+                <a:solidFill>
+                  <a:srgbClr val="0F766E"/>
+                </a:solidFill>
+                <a:latin typeface="Calibri" pitchFamily="34" charset="0"/>
+                <a:ea typeface="Calibri" pitchFamily="34" charset="-122"/>
+                <a:cs typeface="Calibri" pitchFamily="34" charset="-120"/>
+              </a:rPr>
+              <a:t>5–7 Earn</a:t>
+            </a:r>
+            <a:endParaRPr lang="en-US" sz="1500" dirty="0"/>
+          </a:p>
+        </p:txBody>
+      </p:sp>
+      <p:sp>
+        <p:nvSpPr>
+          <p:cNvPr id="15" name="Text 13"/>
+          <p:cNvSpPr/>
+          <p:nvPr/>
+        </p:nvSpPr>
+        <p:spPr>
+          <a:xfrm>
+            <a:off x="5257800" y="4434840"/>
+            <a:ext cx="1874520" cy="1280160"/>
+          </a:xfrm>
+          <a:prstGeom prst="rect">
+            <a:avLst/>
+          </a:prstGeom>
+          <a:noFill/>
+          <a:ln/>
+        </p:spPr>
+        <p:txBody>
+          <a:bodyPr wrap="square" lIns="0" tIns="0" rIns="0" bIns="0" rtlCol="0" anchor="ctr"/>
+          <a:lstStyle/>
           <a:p>
             <a:pPr indent="0" marL="0">
               <a:buNone/>
@@ -1539,100 +1819,10 @@
                 <a:ea typeface="Calibri" pitchFamily="34" charset="-122"/>
                 <a:cs typeface="Calibri" pitchFamily="34" charset="-120"/>
               </a:rPr>
-              <a:t>eventId = txn-88</a:t>
+              <a:t>Brain calc 5 LP</a:t>
             </a:r>
             <a:endParaRPr lang="en-US" sz="1400" dirty="0"/>
           </a:p>
-        </p:txBody>
-      </p:sp>
-      <p:sp>
-        <p:nvSpPr>
-          <p:cNvPr id="7" name="Shape 5"/>
-          <p:cNvSpPr/>
-          <p:nvPr/>
-        </p:nvSpPr>
-        <p:spPr>
-          <a:xfrm>
-            <a:off x="3429000" y="1143000"/>
-            <a:ext cx="2743200" cy="4846320"/>
-          </a:xfrm>
-          <a:prstGeom prst="roundRect">
-            <a:avLst>
-              <a:gd name="adj" fmla="val 3333"/>
-            </a:avLst>
-          </a:prstGeom>
-          <a:solidFill>
-            <a:srgbClr val="FFFFFF"/>
-          </a:solidFill>
-          <a:ln/>
-          <a:effectLst>
-            <a:outerShdw sx="100000" sy="100000" kx="0" ky="0" algn="bl" rotWithShape="0" blurRad="101600" dist="25400" dir="5400000">
-              <a:srgbClr val="0B1220">
-                <a:alpha val="6000"/>
-              </a:srgbClr>
-            </a:outerShdw>
-          </a:effectLst>
-        </p:spPr>
-      </p:sp>
-      <p:sp>
-        <p:nvSpPr>
-          <p:cNvPr id="8" name="Text 6"/>
-          <p:cNvSpPr/>
-          <p:nvPr/>
-        </p:nvSpPr>
-        <p:spPr>
-          <a:xfrm>
-            <a:off x="3611880" y="1417320"/>
-            <a:ext cx="2377440" cy="457200"/>
-          </a:xfrm>
-          <a:prstGeom prst="rect">
-            <a:avLst/>
-          </a:prstGeom>
-          <a:noFill/>
-          <a:ln/>
-        </p:spPr>
-        <p:txBody>
-          <a:bodyPr wrap="square" lIns="0" tIns="0" rIns="0" bIns="0" rtlCol="0" anchor="ctr"/>
-          <a:lstStyle/>
-          <a:p>
-            <a:pPr indent="0" marL="0">
-              <a:buNone/>
-            </a:pPr>
-            <a:r>
-              <a:rPr lang="en-US" sz="1600" b="1" dirty="0">
-                <a:solidFill>
-                  <a:srgbClr val="0F766E"/>
-                </a:solidFill>
-                <a:latin typeface="Calibri" pitchFamily="34" charset="0"/>
-                <a:ea typeface="Calibri" pitchFamily="34" charset="-122"/>
-                <a:cs typeface="Calibri" pitchFamily="34" charset="-120"/>
-              </a:rPr>
-              <a:t>Brain process</a:t>
-            </a:r>
-            <a:endParaRPr lang="en-US" sz="1600" dirty="0"/>
-          </a:p>
-        </p:txBody>
-      </p:sp>
-      <p:sp>
-        <p:nvSpPr>
-          <p:cNvPr id="9" name="Text 7"/>
-          <p:cNvSpPr/>
-          <p:nvPr/>
-        </p:nvSpPr>
-        <p:spPr>
-          <a:xfrm>
-            <a:off x="3611880" y="2103120"/>
-            <a:ext cx="2377440" cy="3566160"/>
-          </a:xfrm>
-          <a:prstGeom prst="rect">
-            <a:avLst/>
-          </a:prstGeom>
-          <a:noFill/>
-          <a:ln/>
-        </p:spPr>
-        <p:txBody>
-          <a:bodyPr wrap="square" lIns="0" tIns="0" rIns="0" bIns="0" rtlCol="0" anchor="ctr"/>
-          <a:lstStyle/>
           <a:p>
             <a:pPr indent="0" marL="0">
               <a:buNone/>
@@ -1646,10 +1836,100 @@
                 <a:ea typeface="Calibri" pitchFamily="34" charset="-122"/>
                 <a:cs typeface="Calibri" pitchFamily="34" charset="-120"/>
               </a:rPr>
-              <a:t>Rule CC_EARN_MCC_5411</a:t>
+              <a:t>Books DE post</a:t>
             </a:r>
             <a:endParaRPr lang="en-US" sz="1400" dirty="0"/>
           </a:p>
+        </p:txBody>
+      </p:sp>
+      <p:sp>
+        <p:nvSpPr>
+          <p:cNvPr id="16" name="Shape 14"/>
+          <p:cNvSpPr/>
+          <p:nvPr/>
+        </p:nvSpPr>
+        <p:spPr>
+          <a:xfrm>
+            <a:off x="7406640" y="3383280"/>
+            <a:ext cx="2148840" cy="2651760"/>
+          </a:xfrm>
+          <a:prstGeom prst="roundRect">
+            <a:avLst>
+              <a:gd name="adj" fmla="val 4255"/>
+            </a:avLst>
+          </a:prstGeom>
+          <a:solidFill>
+            <a:srgbClr val="FFFFFF"/>
+          </a:solidFill>
+          <a:ln/>
+          <a:effectLst>
+            <a:outerShdw sx="100000" sy="100000" kx="0" ky="0" algn="bl" rotWithShape="0" blurRad="101600" dist="25400" dir="5400000">
+              <a:srgbClr val="0B1220">
+                <a:alpha val="6000"/>
+              </a:srgbClr>
+            </a:outerShdw>
+          </a:effectLst>
+        </p:spPr>
+      </p:sp>
+      <p:sp>
+        <p:nvSpPr>
+          <p:cNvPr id="17" name="Text 15"/>
+          <p:cNvSpPr/>
+          <p:nvPr/>
+        </p:nvSpPr>
+        <p:spPr>
+          <a:xfrm>
+            <a:off x="7543800" y="3657600"/>
+            <a:ext cx="1874520" cy="640080"/>
+          </a:xfrm>
+          <a:prstGeom prst="rect">
+            <a:avLst/>
+          </a:prstGeom>
+          <a:noFill/>
+          <a:ln/>
+        </p:spPr>
+        <p:txBody>
+          <a:bodyPr wrap="square" lIns="0" tIns="0" rIns="0" bIns="0" rtlCol="0" anchor="ctr"/>
+          <a:lstStyle/>
+          <a:p>
+            <a:pPr indent="0" marL="0">
+              <a:buNone/>
+            </a:pPr>
+            <a:r>
+              <a:rPr lang="en-US" sz="1500" b="1" dirty="0">
+                <a:solidFill>
+                  <a:srgbClr val="0F766E"/>
+                </a:solidFill>
+                <a:latin typeface="Calibri" pitchFamily="34" charset="0"/>
+                <a:ea typeface="Calibri" pitchFamily="34" charset="-122"/>
+                <a:cs typeface="Calibri" pitchFamily="34" charset="-120"/>
+              </a:rPr>
+              <a:t>8–9 See it</a:t>
+            </a:r>
+            <a:endParaRPr lang="en-US" sz="1500" dirty="0"/>
+          </a:p>
+        </p:txBody>
+      </p:sp>
+      <p:sp>
+        <p:nvSpPr>
+          <p:cNvPr id="18" name="Text 16"/>
+          <p:cNvSpPr/>
+          <p:nvPr/>
+        </p:nvSpPr>
+        <p:spPr>
+          <a:xfrm>
+            <a:off x="7543800" y="4434840"/>
+            <a:ext cx="1874520" cy="1280160"/>
+          </a:xfrm>
+          <a:prstGeom prst="rect">
+            <a:avLst/>
+          </a:prstGeom>
+          <a:noFill/>
+          <a:ln/>
+        </p:spPr>
+        <p:txBody>
+          <a:bodyPr wrap="square" lIns="0" tIns="0" rIns="0" bIns="0" rtlCol="0" anchor="ctr"/>
+          <a:lstStyle/>
           <a:p>
             <a:pPr indent="0" marL="0">
               <a:buNone/>
@@ -1663,7 +1943,7 @@
                 <a:ea typeface="Calibri" pitchFamily="34" charset="-122"/>
                 <a:cs typeface="Calibri" pitchFamily="34" charset="-120"/>
               </a:rPr>
-              <a:t>filters: type·ccy·MCC·age</a:t>
+              <a:t>Wallet +5</a:t>
             </a:r>
             <a:endParaRPr lang="en-US" sz="1400" dirty="0"/>
           </a:p>
@@ -1680,10 +1960,100 @@
                 <a:ea typeface="Calibri" pitchFamily="34" charset="-122"/>
                 <a:cs typeface="Calibri" pitchFamily="34" charset="-120"/>
               </a:rPr>
-              <a:t>formula RATE 0.01</a:t>
+              <a:t>App can notify</a:t>
             </a:r>
             <a:endParaRPr lang="en-US" sz="1400" dirty="0"/>
           </a:p>
+        </p:txBody>
+      </p:sp>
+      <p:sp>
+        <p:nvSpPr>
+          <p:cNvPr id="19" name="Shape 17"/>
+          <p:cNvSpPr/>
+          <p:nvPr/>
+        </p:nvSpPr>
+        <p:spPr>
+          <a:xfrm>
+            <a:off x="9692640" y="3383280"/>
+            <a:ext cx="2148840" cy="2651760"/>
+          </a:xfrm>
+          <a:prstGeom prst="roundRect">
+            <a:avLst>
+              <a:gd name="adj" fmla="val 4255"/>
+            </a:avLst>
+          </a:prstGeom>
+          <a:solidFill>
+            <a:srgbClr val="FFFFFF"/>
+          </a:solidFill>
+          <a:ln/>
+          <a:effectLst>
+            <a:outerShdw sx="100000" sy="100000" kx="0" ky="0" algn="bl" rotWithShape="0" blurRad="101600" dist="25400" dir="5400000">
+              <a:srgbClr val="0B1220">
+                <a:alpha val="6000"/>
+              </a:srgbClr>
+            </a:outerShdw>
+          </a:effectLst>
+        </p:spPr>
+      </p:sp>
+      <p:sp>
+        <p:nvSpPr>
+          <p:cNvPr id="20" name="Text 18"/>
+          <p:cNvSpPr/>
+          <p:nvPr/>
+        </p:nvSpPr>
+        <p:spPr>
+          <a:xfrm>
+            <a:off x="9829800" y="3657600"/>
+            <a:ext cx="1874520" cy="640080"/>
+          </a:xfrm>
+          <a:prstGeom prst="rect">
+            <a:avLst/>
+          </a:prstGeom>
+          <a:noFill/>
+          <a:ln/>
+        </p:spPr>
+        <p:txBody>
+          <a:bodyPr wrap="square" lIns="0" tIns="0" rIns="0" bIns="0" rtlCol="0" anchor="ctr"/>
+          <a:lstStyle/>
+          <a:p>
+            <a:pPr indent="0" marL="0">
+              <a:buNone/>
+            </a:pPr>
+            <a:r>
+              <a:rPr lang="en-US" sz="1500" b="1" dirty="0">
+                <a:solidFill>
+                  <a:srgbClr val="0F766E"/>
+                </a:solidFill>
+                <a:latin typeface="Calibri" pitchFamily="34" charset="0"/>
+                <a:ea typeface="Calibri" pitchFamily="34" charset="-122"/>
+                <a:cs typeface="Calibri" pitchFamily="34" charset="-120"/>
+              </a:rPr>
+              <a:t>10–12 Burn</a:t>
+            </a:r>
+            <a:endParaRPr lang="en-US" sz="1500" dirty="0"/>
+          </a:p>
+        </p:txBody>
+      </p:sp>
+      <p:sp>
+        <p:nvSpPr>
+          <p:cNvPr id="21" name="Text 19"/>
+          <p:cNvSpPr/>
+          <p:nvPr/>
+        </p:nvSpPr>
+        <p:spPr>
+          <a:xfrm>
+            <a:off x="9829800" y="4434840"/>
+            <a:ext cx="1874520" cy="1280160"/>
+          </a:xfrm>
+          <a:prstGeom prst="rect">
+            <a:avLst/>
+          </a:prstGeom>
+          <a:noFill/>
+          <a:ln/>
+        </p:spPr>
+        <p:txBody>
+          <a:bodyPr wrap="square" lIns="0" tIns="0" rIns="0" bIns="0" rtlCol="0" anchor="ctr"/>
+          <a:lstStyle/>
           <a:p>
             <a:pPr indent="0" marL="0">
               <a:buNone/>
@@ -1697,100 +2067,10 @@
                 <a:ea typeface="Calibri" pitchFamily="34" charset="-122"/>
                 <a:cs typeface="Calibri" pitchFamily="34" charset="-120"/>
               </a:rPr>
-              <a:t>first full match wins</a:t>
+              <a:t>Redeem 5 LP</a:t>
             </a:r>
             <a:endParaRPr lang="en-US" sz="1400" dirty="0"/>
           </a:p>
-        </p:txBody>
-      </p:sp>
-      <p:sp>
-        <p:nvSpPr>
-          <p:cNvPr id="10" name="Shape 8"/>
-          <p:cNvSpPr/>
-          <p:nvPr/>
-        </p:nvSpPr>
-        <p:spPr>
-          <a:xfrm>
-            <a:off x="6355080" y="1143000"/>
-            <a:ext cx="2743200" cy="4846320"/>
-          </a:xfrm>
-          <a:prstGeom prst="roundRect">
-            <a:avLst>
-              <a:gd name="adj" fmla="val 3333"/>
-            </a:avLst>
-          </a:prstGeom>
-          <a:solidFill>
-            <a:srgbClr val="FFFFFF"/>
-          </a:solidFill>
-          <a:ln/>
-          <a:effectLst>
-            <a:outerShdw sx="100000" sy="100000" kx="0" ky="0" algn="bl" rotWithShape="0" blurRad="101600" dist="25400" dir="5400000">
-              <a:srgbClr val="0B1220">
-                <a:alpha val="6000"/>
-              </a:srgbClr>
-            </a:outerShdw>
-          </a:effectLst>
-        </p:spPr>
-      </p:sp>
-      <p:sp>
-        <p:nvSpPr>
-          <p:cNvPr id="11" name="Text 9"/>
-          <p:cNvSpPr/>
-          <p:nvPr/>
-        </p:nvSpPr>
-        <p:spPr>
-          <a:xfrm>
-            <a:off x="6537960" y="1417320"/>
-            <a:ext cx="2377440" cy="457200"/>
-          </a:xfrm>
-          <a:prstGeom prst="rect">
-            <a:avLst/>
-          </a:prstGeom>
-          <a:noFill/>
-          <a:ln/>
-        </p:spPr>
-        <p:txBody>
-          <a:bodyPr wrap="square" lIns="0" tIns="0" rIns="0" bIns="0" rtlCol="0" anchor="ctr"/>
-          <a:lstStyle/>
-          <a:p>
-            <a:pPr indent="0" marL="0">
-              <a:buNone/>
-            </a:pPr>
-            <a:r>
-              <a:rPr lang="en-US" sz="1600" b="1" dirty="0">
-                <a:solidFill>
-                  <a:srgbClr val="0F766E"/>
-                </a:solidFill>
-                <a:latin typeface="Calibri" pitchFamily="34" charset="0"/>
-                <a:ea typeface="Calibri" pitchFamily="34" charset="-122"/>
-                <a:cs typeface="Calibri" pitchFamily="34" charset="-120"/>
-              </a:rPr>
-              <a:t>Earn output</a:t>
-            </a:r>
-            <a:endParaRPr lang="en-US" sz="1600" dirty="0"/>
-          </a:p>
-        </p:txBody>
-      </p:sp>
-      <p:sp>
-        <p:nvSpPr>
-          <p:cNvPr id="12" name="Text 10"/>
-          <p:cNvSpPr/>
-          <p:nvPr/>
-        </p:nvSpPr>
-        <p:spPr>
-          <a:xfrm>
-            <a:off x="6537960" y="2103120"/>
-            <a:ext cx="2377440" cy="3566160"/>
-          </a:xfrm>
-          <a:prstGeom prst="rect">
-            <a:avLst/>
-          </a:prstGeom>
-          <a:noFill/>
-          <a:ln/>
-        </p:spPr>
-        <p:txBody>
-          <a:bodyPr wrap="square" lIns="0" tIns="0" rIns="0" bIns="0" rtlCol="0" anchor="ctr"/>
-          <a:lstStyle/>
           <a:p>
             <a:pPr indent="0" marL="0">
               <a:buNone/>
@@ -1804,216 +2084,7 @@
                 <a:ea typeface="Calibri" pitchFamily="34" charset="-122"/>
                 <a:cs typeface="Calibri" pitchFamily="34" charset="-120"/>
               </a:rPr>
-              <a:t>points = 500 × 0.01 = 5 LP</a:t>
-            </a:r>
-            <a:endParaRPr lang="en-US" sz="1400" dirty="0"/>
-          </a:p>
-          <a:p>
-            <a:pPr indent="0" marL="0">
-              <a:buNone/>
-            </a:pPr>
-            <a:r>
-              <a:rPr lang="en-US" sz="1400" dirty="0">
-                <a:solidFill>
-                  <a:srgbClr val="0B1220"/>
-                </a:solidFill>
-                <a:latin typeface="Calibri" pitchFamily="34" charset="0"/>
-                <a:ea typeface="Calibri" pitchFamily="34" charset="-122"/>
-                <a:cs typeface="Calibri" pitchFamily="34" charset="-120"/>
-              </a:rPr>
-              <a:t>DE: DR PROGRAM / CR member</a:t>
-            </a:r>
-            <a:endParaRPr lang="en-US" sz="1400" dirty="0"/>
-          </a:p>
-          <a:p>
-            <a:pPr indent="0" marL="0">
-              <a:buNone/>
-            </a:pPr>
-            <a:r>
-              <a:rPr lang="en-US" sz="1400" dirty="0">
-                <a:solidFill>
-                  <a:srgbClr val="0B1220"/>
-                </a:solidFill>
-                <a:latin typeface="Calibri" pitchFamily="34" charset="0"/>
-                <a:ea typeface="Calibri" pitchFamily="34" charset="-122"/>
-                <a:cs typeface="Calibri" pitchFamily="34" charset="-120"/>
-              </a:rPr>
-              <a:t>status = EARNED</a:t>
-            </a:r>
-            <a:endParaRPr lang="en-US" sz="1400" dirty="0"/>
-          </a:p>
-          <a:p>
-            <a:pPr indent="0" marL="0">
-              <a:buNone/>
-            </a:pPr>
-            <a:r>
-              <a:rPr lang="en-US" sz="1400" dirty="0">
-                <a:solidFill>
-                  <a:srgbClr val="0B1220"/>
-                </a:solidFill>
-                <a:latin typeface="Calibri" pitchFamily="34" charset="0"/>
-                <a:ea typeface="Calibri" pitchFamily="34" charset="-122"/>
-                <a:cs typeface="Calibri" pitchFamily="34" charset="-120"/>
-              </a:rPr>
-              <a:t>idempotent eventId</a:t>
-            </a:r>
-            <a:endParaRPr lang="en-US" sz="1400" dirty="0"/>
-          </a:p>
-        </p:txBody>
-      </p:sp>
-      <p:sp>
-        <p:nvSpPr>
-          <p:cNvPr id="13" name="Shape 11"/>
-          <p:cNvSpPr/>
-          <p:nvPr/>
-        </p:nvSpPr>
-        <p:spPr>
-          <a:xfrm>
-            <a:off x="9281160" y="1143000"/>
-            <a:ext cx="2743200" cy="4846320"/>
-          </a:xfrm>
-          <a:prstGeom prst="roundRect">
-            <a:avLst>
-              <a:gd name="adj" fmla="val 3333"/>
-            </a:avLst>
-          </a:prstGeom>
-          <a:solidFill>
-            <a:srgbClr val="FFFFFF"/>
-          </a:solidFill>
-          <a:ln/>
-          <a:effectLst>
-            <a:outerShdw sx="100000" sy="100000" kx="0" ky="0" algn="bl" rotWithShape="0" blurRad="101600" dist="25400" dir="5400000">
-              <a:srgbClr val="0B1220">
-                <a:alpha val="6000"/>
-              </a:srgbClr>
-            </a:outerShdw>
-          </a:effectLst>
-        </p:spPr>
-      </p:sp>
-      <p:sp>
-        <p:nvSpPr>
-          <p:cNvPr id="14" name="Text 12"/>
-          <p:cNvSpPr/>
-          <p:nvPr/>
-        </p:nvSpPr>
-        <p:spPr>
-          <a:xfrm>
-            <a:off x="9464040" y="1417320"/>
-            <a:ext cx="2377440" cy="457200"/>
-          </a:xfrm>
-          <a:prstGeom prst="rect">
-            <a:avLst/>
-          </a:prstGeom>
-          <a:noFill/>
-          <a:ln/>
-        </p:spPr>
-        <p:txBody>
-          <a:bodyPr wrap="square" lIns="0" tIns="0" rIns="0" bIns="0" rtlCol="0" anchor="ctr"/>
-          <a:lstStyle/>
-          <a:p>
-            <a:pPr indent="0" marL="0">
-              <a:buNone/>
-            </a:pPr>
-            <a:r>
-              <a:rPr lang="en-US" sz="1600" b="1" dirty="0">
-                <a:solidFill>
-                  <a:srgbClr val="0F766E"/>
-                </a:solidFill>
-                <a:latin typeface="Calibri" pitchFamily="34" charset="0"/>
-                <a:ea typeface="Calibri" pitchFamily="34" charset="-122"/>
-                <a:cs typeface="Calibri" pitchFamily="34" charset="-120"/>
-              </a:rPr>
-              <a:t>Later burn</a:t>
-            </a:r>
-            <a:endParaRPr lang="en-US" sz="1600" dirty="0"/>
-          </a:p>
-        </p:txBody>
-      </p:sp>
-      <p:sp>
-        <p:nvSpPr>
-          <p:cNvPr id="15" name="Text 13"/>
-          <p:cNvSpPr/>
-          <p:nvPr/>
-        </p:nvSpPr>
-        <p:spPr>
-          <a:xfrm>
-            <a:off x="9464040" y="2103120"/>
-            <a:ext cx="2377440" cy="3566160"/>
-          </a:xfrm>
-          <a:prstGeom prst="rect">
-            <a:avLst/>
-          </a:prstGeom>
-          <a:noFill/>
-          <a:ln/>
-        </p:spPr>
-        <p:txBody>
-          <a:bodyPr wrap="square" lIns="0" tIns="0" rIns="0" bIns="0" rtlCol="0" anchor="ctr"/>
-          <a:lstStyle/>
-          <a:p>
-            <a:pPr indent="0" marL="0">
-              <a:buNone/>
-            </a:pPr>
-            <a:r>
-              <a:rPr lang="en-US" sz="1400" dirty="0">
-                <a:solidFill>
-                  <a:srgbClr val="0B1220"/>
-                </a:solidFill>
-                <a:latin typeface="Calibri" pitchFamily="34" charset="0"/>
-                <a:ea typeface="Calibri" pitchFamily="34" charset="-122"/>
-                <a:cs typeface="Calibri" pitchFamily="34" charset="-120"/>
-              </a:rPr>
-              <a:t>eventType REDEEM</a:t>
-            </a:r>
-            <a:endParaRPr lang="en-US" sz="1400" dirty="0"/>
-          </a:p>
-          <a:p>
-            <a:pPr indent="0" marL="0">
-              <a:buNone/>
-            </a:pPr>
-            <a:r>
-              <a:rPr lang="en-US" sz="1400" dirty="0">
-                <a:solidFill>
-                  <a:srgbClr val="0B1220"/>
-                </a:solidFill>
-                <a:latin typeface="Calibri" pitchFamily="34" charset="0"/>
-                <a:ea typeface="Calibri" pitchFamily="34" charset="-122"/>
-                <a:cs typeface="Calibri" pitchFamily="34" charset="-120"/>
-              </a:rPr>
-              <a:t>AMT = 5 LP</a:t>
-            </a:r>
-            <a:endParaRPr lang="en-US" sz="1400" dirty="0"/>
-          </a:p>
-          <a:p>
-            <a:pPr indent="0" marL="0">
-              <a:buNone/>
-            </a:pPr>
-            <a:r>
-              <a:rPr lang="en-US" sz="1400" dirty="0">
-                <a:solidFill>
-                  <a:srgbClr val="0B1220"/>
-                </a:solidFill>
-                <a:latin typeface="Calibri" pitchFamily="34" charset="0"/>
-                <a:ea typeface="Calibri" pitchFamily="34" charset="-122"/>
-                <a:cs typeface="Calibri" pitchFamily="34" charset="-120"/>
-              </a:rPr>
-              <a:t>DR member / CR PROGRAM</a:t>
-            </a:r>
-            <a:endParaRPr lang="en-US" sz="1400" dirty="0"/>
-          </a:p>
-          <a:p>
-            <a:pPr indent="0" marL="0">
-              <a:buNone/>
-            </a:pPr>
-            <a:r>
-              <a:rPr lang="en-US" sz="1400" dirty="0">
-                <a:solidFill>
-                  <a:srgbClr val="0B1220"/>
-                </a:solidFill>
-                <a:latin typeface="Calibri" pitchFamily="34" charset="0"/>
-                <a:ea typeface="Calibri" pitchFamily="34" charset="-122"/>
-                <a:cs typeface="Calibri" pitchFamily="34" charset="-120"/>
-              </a:rPr>
-              <a:t>+ E-Coupon fulfil (out)</a:t>
+              <a:t>Coupon fulfil</a:t>
             </a:r>
             <a:endParaRPr lang="en-US" sz="1400" dirty="0"/>
           </a:p>

--- a/docs/decks/LedgeRX-UAF-Earn-Process-Burn-Sequence.pptx
+++ b/docs/decks/LedgeRX-UAF-Earn-Process-Burn-Sequence.pptx
@@ -17,9 +17,12 @@
     <p:sldId id="265" r:id="rId11"/>
     <p:sldId id="266" r:id="rId12"/>
     <p:sldId id="267" r:id="rId13"/>
+    <p:sldId id="268" r:id="rId14"/>
+    <p:sldId id="269" r:id="rId15"/>
+    <p:sldId id="270" r:id="rId16"/>
   </p:sldIdLst>
   <p:notesMasterIdLst>
-    <p:notesMasterId r:id="rId14"/>
+    <p:notesMasterId r:id="rId17"/>
   </p:notesMasterIdLst>
   <p:sldSz cx="12192000" cy="6858000"/>
   <p:notesSz cx="6858000" cy="12192000"/>
@@ -801,6 +804,270 @@
             <a:fld id="{F7021451-1387-4CA6-816F-3879F97B5CBC}" type="slidenum">
               <a:rPr lang="en-US"/>
               <a:t>12</a:t>
+            </a:fld>
+            <a:endParaRPr lang="en-US"/>
+          </a:p>
+        </p:txBody>
+      </p:sp>
+    </p:spTree>
+    <p:extLst>
+      <p:ext uri="{BB962C8B-B14F-4D97-AF65-F5344CB8AC3E}">
+        <p14:creationId xmlns:p14="http://schemas.microsoft.com/office/powerpoint/2010/main" val="1024086991"/>
+      </p:ext>
+    </p:extLst>
+  </p:cSld>
+  <p:clrMapOvr>
+    <a:masterClrMapping/>
+  </p:clrMapOvr>
+</p:notes>
+</file>
+
+<file path=ppt/notesSlides/notesSlide13.xml><?xml version="1.0" encoding="utf-8"?>
+<p:notes xmlns:a="http://schemas.openxmlformats.org/drawingml/2006/main" xmlns:r="http://schemas.openxmlformats.org/officeDocument/2006/relationships" xmlns:p="http://schemas.openxmlformats.org/presentationml/2006/main">
+  <p:cSld>
+    <p:spTree>
+      <p:nvGrpSpPr>
+        <p:cNvPr id="1" name=""/>
+        <p:cNvGrpSpPr/>
+        <p:nvPr/>
+      </p:nvGrpSpPr>
+      <p:grpSpPr>
+        <a:xfrm>
+          <a:off x="0" y="0"/>
+          <a:ext cx="0" cy="0"/>
+          <a:chOff x="0" y="0"/>
+          <a:chExt cx="0" cy="0"/>
+        </a:xfrm>
+      </p:grpSpPr>
+      <p:sp>
+        <p:nvSpPr>
+          <p:cNvPr id="2" name="Slide Image Placeholder 1"/>
+          <p:cNvSpPr>
+            <a:spLocks noGrp="1" noRot="1" noChangeAspect="1"/>
+          </p:cNvSpPr>
+          <p:nvPr>
+            <p:ph type="sldImg"/>
+          </p:nvPr>
+        </p:nvSpPr>
+        <p:spPr/>
+      </p:sp>
+      <p:sp>
+        <p:nvSpPr>
+          <p:cNvPr id="3" name="Notes Placeholder 2"/>
+          <p:cNvSpPr>
+            <a:spLocks noGrp="1"/>
+          </p:cNvSpPr>
+          <p:nvPr>
+            <p:ph type="body" idx="1"/>
+          </p:nvPr>
+        </p:nvSpPr>
+        <p:spPr/>
+        <p:txBody>
+          <a:bodyPr/>
+          <a:lstStyle/>
+          <a:p>
+            <a:r>
+              <a:rPr lang="en-US" dirty="0"/>
+              <a:t/>
+            </a:r>
+            <a:endParaRPr lang="en-US" dirty="0"/>
+          </a:p>
+        </p:txBody>
+      </p:sp>
+      <p:sp>
+        <p:nvSpPr>
+          <p:cNvPr id="4" name="Slide Number Placeholder 3"/>
+          <p:cNvSpPr>
+            <a:spLocks noGrp="1"/>
+          </p:cNvSpPr>
+          <p:nvPr>
+            <p:ph type="sldNum" sz="quarter" idx="10"/>
+          </p:nvPr>
+        </p:nvSpPr>
+        <p:spPr/>
+        <p:txBody>
+          <a:bodyPr/>
+          <a:lstStyle/>
+          <a:p>
+            <a:fld id="{F7021451-1387-4CA6-816F-3879F97B5CBC}" type="slidenum">
+              <a:rPr lang="en-US"/>
+              <a:t>13</a:t>
+            </a:fld>
+            <a:endParaRPr lang="en-US"/>
+          </a:p>
+        </p:txBody>
+      </p:sp>
+    </p:spTree>
+    <p:extLst>
+      <p:ext uri="{BB962C8B-B14F-4D97-AF65-F5344CB8AC3E}">
+        <p14:creationId xmlns:p14="http://schemas.microsoft.com/office/powerpoint/2010/main" val="1024086991"/>
+      </p:ext>
+    </p:extLst>
+  </p:cSld>
+  <p:clrMapOvr>
+    <a:masterClrMapping/>
+  </p:clrMapOvr>
+</p:notes>
+</file>
+
+<file path=ppt/notesSlides/notesSlide14.xml><?xml version="1.0" encoding="utf-8"?>
+<p:notes xmlns:a="http://schemas.openxmlformats.org/drawingml/2006/main" xmlns:r="http://schemas.openxmlformats.org/officeDocument/2006/relationships" xmlns:p="http://schemas.openxmlformats.org/presentationml/2006/main">
+  <p:cSld>
+    <p:spTree>
+      <p:nvGrpSpPr>
+        <p:cNvPr id="1" name=""/>
+        <p:cNvGrpSpPr/>
+        <p:nvPr/>
+      </p:nvGrpSpPr>
+      <p:grpSpPr>
+        <a:xfrm>
+          <a:off x="0" y="0"/>
+          <a:ext cx="0" cy="0"/>
+          <a:chOff x="0" y="0"/>
+          <a:chExt cx="0" cy="0"/>
+        </a:xfrm>
+      </p:grpSpPr>
+      <p:sp>
+        <p:nvSpPr>
+          <p:cNvPr id="2" name="Slide Image Placeholder 1"/>
+          <p:cNvSpPr>
+            <a:spLocks noGrp="1" noRot="1" noChangeAspect="1"/>
+          </p:cNvSpPr>
+          <p:nvPr>
+            <p:ph type="sldImg"/>
+          </p:nvPr>
+        </p:nvSpPr>
+        <p:spPr/>
+      </p:sp>
+      <p:sp>
+        <p:nvSpPr>
+          <p:cNvPr id="3" name="Notes Placeholder 2"/>
+          <p:cNvSpPr>
+            <a:spLocks noGrp="1"/>
+          </p:cNvSpPr>
+          <p:nvPr>
+            <p:ph type="body" idx="1"/>
+          </p:nvPr>
+        </p:nvSpPr>
+        <p:spPr/>
+        <p:txBody>
+          <a:bodyPr/>
+          <a:lstStyle/>
+          <a:p>
+            <a:r>
+              <a:rPr lang="en-US" dirty="0"/>
+              <a:t/>
+            </a:r>
+            <a:endParaRPr lang="en-US" dirty="0"/>
+          </a:p>
+        </p:txBody>
+      </p:sp>
+      <p:sp>
+        <p:nvSpPr>
+          <p:cNvPr id="4" name="Slide Number Placeholder 3"/>
+          <p:cNvSpPr>
+            <a:spLocks noGrp="1"/>
+          </p:cNvSpPr>
+          <p:nvPr>
+            <p:ph type="sldNum" sz="quarter" idx="10"/>
+          </p:nvPr>
+        </p:nvSpPr>
+        <p:spPr/>
+        <p:txBody>
+          <a:bodyPr/>
+          <a:lstStyle/>
+          <a:p>
+            <a:fld id="{F7021451-1387-4CA6-816F-3879F97B5CBC}" type="slidenum">
+              <a:rPr lang="en-US"/>
+              <a:t>14</a:t>
+            </a:fld>
+            <a:endParaRPr lang="en-US"/>
+          </a:p>
+        </p:txBody>
+      </p:sp>
+    </p:spTree>
+    <p:extLst>
+      <p:ext uri="{BB962C8B-B14F-4D97-AF65-F5344CB8AC3E}">
+        <p14:creationId xmlns:p14="http://schemas.microsoft.com/office/powerpoint/2010/main" val="1024086991"/>
+      </p:ext>
+    </p:extLst>
+  </p:cSld>
+  <p:clrMapOvr>
+    <a:masterClrMapping/>
+  </p:clrMapOvr>
+</p:notes>
+</file>
+
+<file path=ppt/notesSlides/notesSlide15.xml><?xml version="1.0" encoding="utf-8"?>
+<p:notes xmlns:a="http://schemas.openxmlformats.org/drawingml/2006/main" xmlns:r="http://schemas.openxmlformats.org/officeDocument/2006/relationships" xmlns:p="http://schemas.openxmlformats.org/presentationml/2006/main">
+  <p:cSld>
+    <p:spTree>
+      <p:nvGrpSpPr>
+        <p:cNvPr id="1" name=""/>
+        <p:cNvGrpSpPr/>
+        <p:nvPr/>
+      </p:nvGrpSpPr>
+      <p:grpSpPr>
+        <a:xfrm>
+          <a:off x="0" y="0"/>
+          <a:ext cx="0" cy="0"/>
+          <a:chOff x="0" y="0"/>
+          <a:chExt cx="0" cy="0"/>
+        </a:xfrm>
+      </p:grpSpPr>
+      <p:sp>
+        <p:nvSpPr>
+          <p:cNvPr id="2" name="Slide Image Placeholder 1"/>
+          <p:cNvSpPr>
+            <a:spLocks noGrp="1" noRot="1" noChangeAspect="1"/>
+          </p:cNvSpPr>
+          <p:nvPr>
+            <p:ph type="sldImg"/>
+          </p:nvPr>
+        </p:nvSpPr>
+        <p:spPr/>
+      </p:sp>
+      <p:sp>
+        <p:nvSpPr>
+          <p:cNvPr id="3" name="Notes Placeholder 2"/>
+          <p:cNvSpPr>
+            <a:spLocks noGrp="1"/>
+          </p:cNvSpPr>
+          <p:nvPr>
+            <p:ph type="body" idx="1"/>
+          </p:nvPr>
+        </p:nvSpPr>
+        <p:spPr/>
+        <p:txBody>
+          <a:bodyPr/>
+          <a:lstStyle/>
+          <a:p>
+            <a:r>
+              <a:rPr lang="en-US" dirty="0"/>
+              <a:t/>
+            </a:r>
+            <a:endParaRPr lang="en-US" dirty="0"/>
+          </a:p>
+        </p:txBody>
+      </p:sp>
+      <p:sp>
+        <p:nvSpPr>
+          <p:cNvPr id="4" name="Slide Number Placeholder 3"/>
+          <p:cNvSpPr>
+            <a:spLocks noGrp="1"/>
+          </p:cNvSpPr>
+          <p:nvPr>
+            <p:ph type="sldNum" sz="quarter" idx="10"/>
+          </p:nvPr>
+        </p:nvSpPr>
+        <p:spPr/>
+        <p:txBody>
+          <a:bodyPr/>
+          <a:lstStyle/>
+          <a:p>
+            <a:fld id="{F7021451-1387-4CA6-816F-3879F97B5CBC}" type="slidenum">
+              <a:rPr lang="en-US"/>
+              <a:t>15</a:t>
             </a:fld>
             <a:endParaRPr lang="en-US"/>
           </a:p>
@@ -1954,7 +2221,7 @@
         <p:spPr>
           <a:xfrm>
             <a:off x="640080" y="3017520"/>
-            <a:ext cx="10972800" cy="411480"/>
+            <a:ext cx="10972800" cy="822960"/>
           </a:xfrm>
           <a:prstGeom prst="rect">
             <a:avLst/>
@@ -1978,10 +2245,27 @@
                 <a:ea typeface="Calibri" pitchFamily="34" charset="-122"/>
                 <a:cs typeface="Calibri" pitchFamily="34" charset="-120"/>
               </a:rPr>
-              <a:t>One CC customer story — one idea per slide</a:t>
+              <a:t>Main deck = one idea per slide</a:t>
             </a:r>
             <a:endParaRPr lang="en-US" sz="2000" dirty="0"/>
           </a:p>
+          <a:p>
+            <a:pPr indent="0" marL="0">
+              <a:buNone/>
+            </a:pPr>
+            <a:r>
+              <a:rPr lang="en-US" sz="2000" dirty="0">
+                <a:solidFill>
+                  <a:srgbClr val="94A3B8"/>
+                </a:solidFill>
+                <a:latin typeface="Calibri" pitchFamily="34" charset="0"/>
+                <a:ea typeface="Calibri" pitchFamily="34" charset="-122"/>
+                <a:cs typeface="Calibri" pitchFamily="34" charset="-120"/>
+              </a:rPr>
+              <a:t>Appendix = full sequence board (2 pages)</a:t>
+            </a:r>
+            <a:endParaRPr lang="en-US" sz="2000" dirty="0"/>
+          </a:p>
         </p:txBody>
       </p:sp>
       <p:sp>
@@ -1992,12 +2276,12 @@
         </p:nvSpPr>
         <p:spPr>
           <a:xfrm>
-            <a:off x="640080" y="3840480"/>
-            <a:ext cx="10881360" cy="1463040"/>
+            <a:off x="640080" y="4114800"/>
+            <a:ext cx="10881360" cy="1371600"/>
           </a:xfrm>
           <a:prstGeom prst="roundRect">
             <a:avLst>
-              <a:gd name="adj" fmla="val 6250"/>
+              <a:gd name="adj" fmla="val 6667"/>
             </a:avLst>
           </a:prstGeom>
           <a:solidFill>
@@ -2014,8 +2298,8 @@
         </p:nvSpPr>
         <p:spPr>
           <a:xfrm>
-            <a:off x="914400" y="4114800"/>
-            <a:ext cx="10332720" cy="1051560"/>
+            <a:off x="914400" y="4526280"/>
+            <a:ext cx="10332720" cy="548640"/>
           </a:xfrm>
           <a:prstGeom prst="rect">
             <a:avLst/>
@@ -2039,41 +2323,7 @@
                 <a:ea typeface="Calibri" pitchFamily="34" charset="-122"/>
                 <a:cs typeface="Calibri" pitchFamily="34" charset="-120"/>
               </a:rPr>
-              <a:t>Customer pays HKD 500  at grocery (MCC 5411)</a:t>
-            </a:r>
-            <a:endParaRPr lang="en-US" sz="2000" dirty="0"/>
-          </a:p>
-          <a:p>
-            <a:pPr indent="0" marL="0">
-              <a:buNone/>
-            </a:pPr>
-            <a:r>
-              <a:rPr lang="en-US" sz="2000" dirty="0">
-                <a:solidFill>
-                  <a:srgbClr val="FFFFFF"/>
-                </a:solidFill>
-                <a:latin typeface="Calibri" pitchFamily="34" charset="0"/>
-                <a:ea typeface="Calibri" pitchFamily="34" charset="-122"/>
-                <a:cs typeface="Calibri" pitchFamily="34" charset="-120"/>
-              </a:rPr>
-              <a:t>Brain: 1%  →  earns 5 LP</a:t>
-            </a:r>
-            <a:endParaRPr lang="en-US" sz="2000" dirty="0"/>
-          </a:p>
-          <a:p>
-            <a:pPr indent="0" marL="0">
-              <a:buNone/>
-            </a:pPr>
-            <a:r>
-              <a:rPr lang="en-US" sz="2000" dirty="0">
-                <a:solidFill>
-                  <a:srgbClr val="FFFFFF"/>
-                </a:solidFill>
-                <a:latin typeface="Calibri" pitchFamily="34" charset="0"/>
-                <a:ea typeface="Calibri" pitchFamily="34" charset="-122"/>
-                <a:cs typeface="Calibri" pitchFamily="34" charset="-120"/>
-              </a:rPr>
-              <a:t>Later redeems 5 LP for e-coupon</a:t>
+              <a:t>HKD 500 grocery (MCC 5411) → 1% → +5 LP → later redeem −5 LP</a:t>
             </a:r>
             <a:endParaRPr lang="en-US" sz="2000" dirty="0"/>
           </a:p>
@@ -2706,7 +2956,7 @@
         <p:spPr>
           <a:xfrm>
             <a:off x="6675120" y="4023360"/>
-            <a:ext cx="4572000" cy="1371600"/>
+            <a:ext cx="4572000" cy="1097280"/>
           </a:xfrm>
           <a:prstGeom prst="rect">
             <a:avLst/>
@@ -2748,23 +2998,6 @@
                 <a:cs typeface="Calibri" pitchFamily="34" charset="-120"/>
               </a:rPr>
               <a:t>GET /wallets/{ownerId}</a:t>
-            </a:r>
-            <a:endParaRPr lang="en-US" sz="1800" dirty="0"/>
-          </a:p>
-          <a:p>
-            <a:pPr indent="0" marL="0">
-              <a:buNone/>
-            </a:pPr>
-            <a:r>
-              <a:rPr lang="en-US" sz="1800" dirty="0">
-                <a:solidFill>
-                  <a:srgbClr val="CBD5E1"/>
-                </a:solidFill>
-                <a:latin typeface="Calibri" pitchFamily="34" charset="0"/>
-                <a:ea typeface="Calibri" pitchFamily="34" charset="-122"/>
-                <a:cs typeface="Calibri" pitchFamily="34" charset="-120"/>
-              </a:rPr>
-              <a:t>movements + DE legs stored</a:t>
             </a:r>
             <a:endParaRPr lang="en-US" sz="1800" dirty="0"/>
           </a:p>
@@ -2842,7 +3075,7 @@
                 <a:ea typeface="Calibri" pitchFamily="34" charset="-122"/>
                 <a:cs typeface="Calibri" pitchFamily="34" charset="-120"/>
               </a:rPr>
-              <a:t>10 / 12</a:t>
+              <a:t>10 / 15</a:t>
             </a:r>
             <a:endParaRPr lang="en-US" sz="1100" dirty="0"/>
           </a:p>
@@ -2987,7 +3220,7 @@
                 <a:ea typeface="Calibri" pitchFamily="34" charset="-122"/>
                 <a:cs typeface="Calibri" pitchFamily="34" charset="-120"/>
               </a:rPr>
-              <a:t>Same spine · opposite money direction</a:t>
+              <a:t>Same spine · opposite direction</a:t>
             </a:r>
             <a:endParaRPr lang="en-US" sz="1800" dirty="0"/>
           </a:p>
@@ -3322,24 +3555,7 @@
                 <a:ea typeface="Calibri" pitchFamily="34" charset="-122"/>
                 <a:cs typeface="Calibri" pitchFamily="34" charset="-120"/>
               </a:rPr>
-              <a:t>eventType = REDEEM</a:t>
-            </a:r>
-            <a:endParaRPr lang="en-US" sz="1600" dirty="0"/>
-          </a:p>
-          <a:p>
-            <a:pPr algn="ctr" indent="0" marL="0">
-              <a:buNone/>
-            </a:pPr>
-            <a:r>
-              <a:rPr lang="en-US" sz="1600" dirty="0">
-                <a:solidFill>
-                  <a:srgbClr val="334155"/>
-                </a:solidFill>
-                <a:latin typeface="Calibri" pitchFamily="34" charset="0"/>
-                <a:ea typeface="Calibri" pitchFamily="34" charset="-122"/>
-                <a:cs typeface="Calibri" pitchFamily="34" charset="-120"/>
-              </a:rPr>
-              <a:t>rule CC_BURN_REDEEM</a:t>
+              <a:t>REDEEM · CC_BURN_REDEEM</a:t>
             </a:r>
             <a:endParaRPr lang="en-US" sz="1600" dirty="0"/>
           </a:p>
@@ -3610,7 +3826,7 @@
                 <a:ea typeface="Calibri" pitchFamily="34" charset="-122"/>
                 <a:cs typeface="Calibri" pitchFamily="34" charset="-120"/>
               </a:rPr>
-              <a:t>11 / 12</a:t>
+              <a:t>11 / 15</a:t>
             </a:r>
             <a:endParaRPr lang="en-US" sz="1100" dirty="0"/>
           </a:p>
@@ -3694,7 +3910,7 @@
                 <a:ea typeface="Calibri" pitchFamily="34" charset="-122"/>
                 <a:cs typeface="Calibri" pitchFamily="34" charset="-120"/>
               </a:rPr>
-              <a:t>Burn posting + end state</a:t>
+              <a:t>End of main walkthrough</a:t>
             </a:r>
             <a:endParaRPr lang="en-US" sz="2800" dirty="0"/>
           </a:p>
@@ -3709,11 +3925,11 @@
         <p:spPr>
           <a:xfrm>
             <a:off x="548640" y="1097280"/>
-            <a:ext cx="5486400" cy="2926080"/>
+            <a:ext cx="5486400" cy="2743200"/>
           </a:xfrm>
           <a:prstGeom prst="roundRect">
             <a:avLst>
-              <a:gd name="adj" fmla="val 3125"/>
+              <a:gd name="adj" fmla="val 3333"/>
             </a:avLst>
           </a:prstGeom>
           <a:solidFill>
@@ -3755,7 +3971,7 @@
                 <a:ea typeface="Calibri" pitchFamily="34" charset="-122"/>
                 <a:cs typeface="Calibri" pitchFamily="34" charset="-120"/>
               </a:rPr>
-              <a:t>Burn 5 LP (DE)</a:t>
+              <a:t>Burn DE</a:t>
             </a:r>
             <a:endParaRPr lang="en-US" sz="1800" dirty="0"/>
           </a:p>
@@ -3794,7 +4010,7 @@
                 <a:ea typeface="Calibri" pitchFamily="34" charset="-122"/>
                 <a:cs typeface="Calibri" pitchFamily="34" charset="-120"/>
               </a:rPr>
-              <a:t>DEBIT member LP   5</a:t>
+              <a:t>DEBIT member LP  5</a:t>
             </a:r>
             <a:endParaRPr lang="en-US" sz="2200" dirty="0"/>
           </a:p>
@@ -3811,7 +4027,7 @@
                 <a:ea typeface="Calibri" pitchFamily="34" charset="-122"/>
                 <a:cs typeface="Calibri" pitchFamily="34" charset="-120"/>
               </a:rPr>
-              <a:t>CREDIT PROGRAM LP  5</a:t>
+              <a:t>CREDIT PROGRAM   5</a:t>
             </a:r>
             <a:endParaRPr lang="en-US" sz="2200" dirty="0"/>
           </a:p>
@@ -3819,57 +4035,18 @@
       </p:sp>
       <p:sp>
         <p:nvSpPr>
-          <p:cNvPr id="7" name="Text 5"/>
-          <p:cNvSpPr/>
-          <p:nvPr/>
-        </p:nvSpPr>
-        <p:spPr>
-          <a:xfrm>
-            <a:off x="914400" y="3291840"/>
-            <a:ext cx="4754880" cy="457200"/>
-          </a:xfrm>
-          <a:prstGeom prst="rect">
-            <a:avLst/>
-          </a:prstGeom>
-          <a:noFill/>
-          <a:ln/>
-        </p:spPr>
-        <p:txBody>
-          <a:bodyPr wrap="square" lIns="0" tIns="0" rIns="0" bIns="0" rtlCol="0" anchor="ctr"/>
-          <a:lstStyle/>
-          <a:p>
-            <a:pPr indent="0" marL="0">
-              <a:buNone/>
-            </a:pPr>
-            <a:r>
-              <a:rPr lang="en-US" sz="1500" dirty="0">
-                <a:solidFill>
-                  <a:srgbClr val="64748B"/>
-                </a:solidFill>
-                <a:latin typeface="Calibri" pitchFamily="34" charset="0"/>
-                <a:ea typeface="Calibri" pitchFamily="34" charset="-122"/>
-                <a:cs typeface="Calibri" pitchFamily="34" charset="-120"/>
-              </a:rPr>
-              <a:t>Then E-Coupon / Stock fulfil outside LedgeRX</a:t>
-            </a:r>
-            <a:endParaRPr lang="en-US" sz="1500" dirty="0"/>
-          </a:p>
-        </p:txBody>
-      </p:sp>
-      <p:sp>
-        <p:nvSpPr>
-          <p:cNvPr id="8" name="Shape 6"/>
+          <p:cNvPr id="7" name="Shape 5"/>
           <p:cNvSpPr/>
           <p:nvPr/>
         </p:nvSpPr>
         <p:spPr>
           <a:xfrm>
             <a:off x="6309360" y="1097280"/>
-            <a:ext cx="5394960" cy="2926080"/>
+            <a:ext cx="5394960" cy="2743200"/>
           </a:xfrm>
           <a:prstGeom prst="roundRect">
             <a:avLst>
-              <a:gd name="adj" fmla="val 3125"/>
+              <a:gd name="adj" fmla="val 3333"/>
             </a:avLst>
           </a:prstGeom>
           <a:solidFill>
@@ -3880,7 +4057,7 @@
       </p:sp>
       <p:sp>
         <p:nvSpPr>
-          <p:cNvPr id="9" name="Text 7"/>
+          <p:cNvPr id="8" name="Text 6"/>
           <p:cNvSpPr/>
           <p:nvPr/>
         </p:nvSpPr>
@@ -3911,7 +4088,7 @@
                 <a:ea typeface="Calibri" pitchFamily="34" charset="-122"/>
                 <a:cs typeface="Calibri" pitchFamily="34" charset="-120"/>
               </a:rPr>
-              <a:t>End of story</a:t>
+              <a:t>Story net</a:t>
             </a:r>
             <a:endParaRPr lang="en-US" sz="1800" dirty="0"/>
           </a:p>
@@ -3919,14 +4096,14 @@
       </p:sp>
       <p:sp>
         <p:nvSpPr>
-          <p:cNvPr id="10" name="Text 8"/>
+          <p:cNvPr id="9" name="Text 7"/>
           <p:cNvSpPr/>
           <p:nvPr/>
         </p:nvSpPr>
         <p:spPr>
           <a:xfrm>
             <a:off x="6675120" y="2011680"/>
-            <a:ext cx="4663440" cy="1645920"/>
+            <a:ext cx="4663440" cy="1371600"/>
           </a:xfrm>
           <a:prstGeom prst="rect">
             <a:avLst/>
@@ -3967,7 +4144,7 @@
                 <a:ea typeface="Calibri" pitchFamily="34" charset="-122"/>
                 <a:cs typeface="Calibri" pitchFamily="34" charset="-120"/>
               </a:rPr>
-              <a:t>Redeemed → 0 net LP</a:t>
+              <a:t>Redeemed → 0 net</a:t>
             </a:r>
             <a:endParaRPr lang="en-US" sz="2200" dirty="0"/>
           </a:p>
@@ -3984,7 +4161,7 @@
                 <a:ea typeface="Calibri" pitchFamily="34" charset="-122"/>
                 <a:cs typeface="Calibri" pitchFamily="34" charset="-120"/>
               </a:rPr>
-              <a:t>Full audit on eventId</a:t>
+              <a:t>Audit on eventId</a:t>
             </a:r>
             <a:endParaRPr lang="en-US" sz="2200" dirty="0"/>
           </a:p>
@@ -3992,107 +4169,107 @@
       </p:sp>
       <p:sp>
         <p:nvSpPr>
-          <p:cNvPr id="11" name="Shape 9"/>
-          <p:cNvSpPr/>
-          <p:nvPr/>
-        </p:nvSpPr>
-        <p:spPr>
-          <a:xfrm>
-            <a:off x="548640" y="4297680"/>
-            <a:ext cx="11155680" cy="1737360"/>
+          <p:cNvPr id="10" name="Shape 8"/>
+          <p:cNvSpPr/>
+          <p:nvPr/>
+        </p:nvSpPr>
+        <p:spPr>
+          <a:xfrm>
+            <a:off x="548640" y="4206240"/>
+            <a:ext cx="11155680" cy="1828800"/>
           </a:xfrm>
           <a:prstGeom prst="roundRect">
             <a:avLst>
-              <a:gd name="adj" fmla="val 5263"/>
+              <a:gd name="adj" fmla="val 5000"/>
             </a:avLst>
           </a:prstGeom>
           <a:solidFill>
-            <a:srgbClr val="FFFFFF"/>
+            <a:srgbClr val="ECFDF5"/>
           </a:solidFill>
           <a:ln/>
         </p:spPr>
       </p:sp>
       <p:sp>
         <p:nvSpPr>
+          <p:cNvPr id="11" name="Text 9"/>
+          <p:cNvSpPr/>
+          <p:nvPr/>
+        </p:nvSpPr>
+        <p:spPr>
+          <a:xfrm>
+            <a:off x="914400" y="4526280"/>
+            <a:ext cx="10424160" cy="365760"/>
+          </a:xfrm>
+          <a:prstGeom prst="rect">
+            <a:avLst/>
+          </a:prstGeom>
+          <a:noFill/>
+          <a:ln/>
+        </p:spPr>
+        <p:txBody>
+          <a:bodyPr wrap="square" lIns="0" tIns="0" rIns="0" bIns="0" rtlCol="0" anchor="ctr"/>
+          <a:lstStyle/>
+          <a:p>
+            <a:pPr indent="0" marL="0">
+              <a:buNone/>
+            </a:pPr>
+            <a:r>
+              <a:rPr lang="en-US" sz="1600" b="1" dirty="0">
+                <a:solidFill>
+                  <a:srgbClr val="0F766E"/>
+                </a:solidFill>
+                <a:latin typeface="Calibri" pitchFamily="34" charset="0"/>
+                <a:ea typeface="Calibri" pitchFamily="34" charset="-122"/>
+                <a:cs typeface="Calibri" pitchFamily="34" charset="-120"/>
+              </a:rPr>
+              <a:t>Appendix next</a:t>
+            </a:r>
+            <a:endParaRPr lang="en-US" sz="1600" dirty="0"/>
+          </a:p>
+        </p:txBody>
+      </p:sp>
+      <p:sp>
+        <p:nvSpPr>
           <p:cNvPr id="12" name="Text 10"/>
           <p:cNvSpPr/>
           <p:nvPr/>
         </p:nvSpPr>
         <p:spPr>
           <a:xfrm>
-            <a:off x="914400" y="4572000"/>
-            <a:ext cx="10424160" cy="320040"/>
-          </a:xfrm>
-          <a:prstGeom prst="rect">
-            <a:avLst/>
-          </a:prstGeom>
-          <a:noFill/>
-          <a:ln/>
-        </p:spPr>
-        <p:txBody>
-          <a:bodyPr wrap="square" lIns="0" tIns="0" rIns="0" bIns="0" rtlCol="0" anchor="ctr"/>
-          <a:lstStyle/>
-          <a:p>
-            <a:pPr indent="0" marL="0">
-              <a:buNone/>
-            </a:pPr>
-            <a:r>
-              <a:rPr lang="en-US" sz="1600" b="1" dirty="0">
-                <a:solidFill>
-                  <a:srgbClr val="0F766E"/>
-                </a:solidFill>
-                <a:latin typeface="Calibri" pitchFamily="34" charset="0"/>
-                <a:ea typeface="Calibri" pitchFamily="34" charset="-122"/>
-                <a:cs typeface="Calibri" pitchFamily="34" charset="-120"/>
-              </a:rPr>
-              <a:t>Remember for UAF landscape</a:t>
-            </a:r>
-            <a:endParaRPr lang="en-US" sz="1600" dirty="0"/>
+            <a:off x="914400" y="5029200"/>
+            <a:ext cx="10424160" cy="640080"/>
+          </a:xfrm>
+          <a:prstGeom prst="rect">
+            <a:avLst/>
+          </a:prstGeom>
+          <a:noFill/>
+          <a:ln/>
+        </p:spPr>
+        <p:txBody>
+          <a:bodyPr wrap="square" lIns="0" tIns="0" rIns="0" bIns="0" rtlCol="0" anchor="ctr"/>
+          <a:lstStyle/>
+          <a:p>
+            <a:pPr indent="0" marL="0">
+              <a:buNone/>
+            </a:pPr>
+            <a:r>
+              <a:rPr lang="en-US" sz="1800" dirty="0">
+                <a:solidFill>
+                  <a:srgbClr val="334155"/>
+                </a:solidFill>
+                <a:latin typeface="Calibri" pitchFamily="34" charset="0"/>
+                <a:ea typeface="Calibri" pitchFamily="34" charset="-122"/>
+                <a:cs typeface="Calibri" pitchFamily="34" charset="-120"/>
+              </a:rPr>
+              <a:t>Full sequence board split into 2 slides — same content as the readable HTML one-pager, for leave-behind.</a:t>
+            </a:r>
+            <a:endParaRPr lang="en-US" sz="1800" dirty="0"/>
           </a:p>
         </p:txBody>
       </p:sp>
       <p:sp>
         <p:nvSpPr>
           <p:cNvPr id="13" name="Text 11"/>
-          <p:cNvSpPr/>
-          <p:nvPr/>
-        </p:nvSpPr>
-        <p:spPr>
-          <a:xfrm>
-            <a:off x="914400" y="5074920"/>
-            <a:ext cx="10424160" cy="640080"/>
-          </a:xfrm>
-          <a:prstGeom prst="rect">
-            <a:avLst/>
-          </a:prstGeom>
-          <a:noFill/>
-          <a:ln/>
-        </p:spPr>
-        <p:txBody>
-          <a:bodyPr wrap="square" lIns="0" tIns="0" rIns="0" bIns="0" rtlCol="0" anchor="ctr"/>
-          <a:lstStyle/>
-          <a:p>
-            <a:pPr indent="0" marL="0">
-              <a:buNone/>
-            </a:pPr>
-            <a:r>
-              <a:rPr lang="en-US" sz="1800" dirty="0">
-                <a:solidFill>
-                  <a:srgbClr val="334155"/>
-                </a:solidFill>
-                <a:latin typeface="Calibri" pitchFamily="34" charset="0"/>
-                <a:ea typeface="Calibri" pitchFamily="34" charset="-122"/>
-                <a:cs typeface="Calibri" pitchFamily="34" charset="-120"/>
-              </a:rPr>
-              <a:t>cc-xapi stays  ·  one LedgeRX (not 3 ledgers)  ·  SDK for IT  ·  Brain owns %  ·  Books owns DE  ·  Coupon owns fulfil</a:t>
-            </a:r>
-            <a:endParaRPr lang="en-US" sz="1800" dirty="0"/>
-          </a:p>
-        </p:txBody>
-      </p:sp>
-      <p:sp>
-        <p:nvSpPr>
-          <p:cNvPr id="14" name="Text 12"/>
           <p:cNvSpPr/>
           <p:nvPr/>
         </p:nvSpPr>
@@ -4131,7 +4308,7 @@
       </p:sp>
       <p:sp>
         <p:nvSpPr>
-          <p:cNvPr id="15" name="Text 13"/>
+          <p:cNvPr id="14" name="Text 12"/>
           <p:cNvSpPr/>
           <p:nvPr/>
         </p:nvSpPr>
@@ -4162,12 +4339,424 @@
                 <a:ea typeface="Calibri" pitchFamily="34" charset="-122"/>
                 <a:cs typeface="Calibri" pitchFamily="34" charset="-120"/>
               </a:rPr>
-              <a:t>12 / 12</a:t>
+              <a:t>12 / 15</a:t>
             </a:r>
             <a:endParaRPr lang="en-US" sz="1100" dirty="0"/>
           </a:p>
         </p:txBody>
       </p:sp>
+    </p:spTree>
+  </p:cSld>
+  <p:clrMapOvr>
+    <a:masterClrMapping/>
+  </p:clrMapOvr>
+</p:sld>
+</file>
+
+<file path=ppt/slides/slide13.xml><?xml version="1.0" encoding="utf-8"?>
+<p:sld xmlns:a="http://schemas.openxmlformats.org/drawingml/2006/main" xmlns:r="http://schemas.openxmlformats.org/officeDocument/2006/relationships" xmlns:p="http://schemas.openxmlformats.org/presentationml/2006/main">
+  <p:cSld name="Slide 13">
+    <p:spTree>
+      <p:nvGrpSpPr>
+        <p:cNvPr id="1" name=""/>
+        <p:cNvGrpSpPr/>
+        <p:nvPr/>
+      </p:nvGrpSpPr>
+      <p:grpSpPr>
+        <a:xfrm>
+          <a:off x="0" y="0"/>
+          <a:ext cx="0" cy="0"/>
+          <a:chOff x="0" y="0"/>
+          <a:chExt cx="0" cy="0"/>
+        </a:xfrm>
+      </p:grpSpPr>
+      <p:sp>
+        <p:nvSpPr>
+          <p:cNvPr id="2" name="Shape 0"/>
+          <p:cNvSpPr/>
+          <p:nvPr/>
+        </p:nvSpPr>
+        <p:spPr>
+          <a:xfrm>
+            <a:off x="0" y="0"/>
+            <a:ext cx="12161520" cy="6858000"/>
+          </a:xfrm>
+          <a:prstGeom prst="rect">
+            <a:avLst/>
+          </a:prstGeom>
+          <a:solidFill>
+            <a:srgbClr val="0C2340"/>
+          </a:solidFill>
+          <a:ln/>
+        </p:spPr>
+      </p:sp>
+      <p:sp>
+        <p:nvSpPr>
+          <p:cNvPr id="3" name="Text 1"/>
+          <p:cNvSpPr/>
+          <p:nvPr/>
+        </p:nvSpPr>
+        <p:spPr>
+          <a:xfrm>
+            <a:off x="640080" y="2194560"/>
+            <a:ext cx="10972800" cy="365760"/>
+          </a:xfrm>
+          <a:prstGeom prst="rect">
+            <a:avLst/>
+          </a:prstGeom>
+          <a:noFill/>
+          <a:ln/>
+        </p:spPr>
+        <p:txBody>
+          <a:bodyPr wrap="square" lIns="0" tIns="0" rIns="0" bIns="0" rtlCol="0" anchor="ctr"/>
+          <a:lstStyle/>
+          <a:p>
+            <a:pPr indent="0" marL="0">
+              <a:buNone/>
+            </a:pPr>
+            <a:r>
+              <a:rPr lang="en-US" sz="1600" b="1" dirty="0">
+                <a:solidFill>
+                  <a:srgbClr val="14B8A6"/>
+                </a:solidFill>
+                <a:latin typeface="Calibri" pitchFamily="34" charset="0"/>
+                <a:ea typeface="Calibri" pitchFamily="34" charset="-122"/>
+                <a:cs typeface="Calibri" pitchFamily="34" charset="-120"/>
+              </a:rPr>
+              <a:t>APPENDIX</a:t>
+            </a:r>
+            <a:endParaRPr lang="en-US" sz="1600" dirty="0"/>
+          </a:p>
+        </p:txBody>
+      </p:sp>
+      <p:sp>
+        <p:nvSpPr>
+          <p:cNvPr id="4" name="Text 2"/>
+          <p:cNvSpPr/>
+          <p:nvPr/>
+        </p:nvSpPr>
+        <p:spPr>
+          <a:xfrm>
+            <a:off x="640080" y="2743200"/>
+            <a:ext cx="10972800" cy="1188720"/>
+          </a:xfrm>
+          <a:prstGeom prst="rect">
+            <a:avLst/>
+          </a:prstGeom>
+          <a:noFill/>
+          <a:ln/>
+        </p:spPr>
+        <p:txBody>
+          <a:bodyPr wrap="square" lIns="0" tIns="0" rIns="0" bIns="0" rtlCol="0" anchor="ctr"/>
+          <a:lstStyle/>
+          <a:p>
+            <a:pPr indent="0" marL="0">
+              <a:buNone/>
+            </a:pPr>
+            <a:r>
+              <a:rPr lang="en-US" sz="3600" b="1" dirty="0">
+                <a:solidFill>
+                  <a:srgbClr val="FFFFFF"/>
+                </a:solidFill>
+                <a:latin typeface="Calibri" pitchFamily="34" charset="0"/>
+                <a:ea typeface="Calibri" pitchFamily="34" charset="-122"/>
+                <a:cs typeface="Calibri" pitchFamily="34" charset="-120"/>
+              </a:rPr>
+              <a:t>Full sequence board</a:t>
+            </a:r>
+            <a:endParaRPr lang="en-US" sz="3600" dirty="0"/>
+          </a:p>
+          <a:p>
+            <a:pPr indent="0" marL="0">
+              <a:buNone/>
+            </a:pPr>
+            <a:r>
+              <a:rPr lang="en-US" sz="3600" b="1" dirty="0">
+                <a:solidFill>
+                  <a:srgbClr val="FFFFFF"/>
+                </a:solidFill>
+                <a:latin typeface="Calibri" pitchFamily="34" charset="0"/>
+                <a:ea typeface="Calibri" pitchFamily="34" charset="-122"/>
+                <a:cs typeface="Calibri" pitchFamily="34" charset="-120"/>
+              </a:rPr>
+              <a:t>(2 halves)</a:t>
+            </a:r>
+            <a:endParaRPr lang="en-US" sz="3600" dirty="0"/>
+          </a:p>
+        </p:txBody>
+      </p:sp>
+      <p:sp>
+        <p:nvSpPr>
+          <p:cNvPr id="5" name="Text 3"/>
+          <p:cNvSpPr/>
+          <p:nvPr/>
+        </p:nvSpPr>
+        <p:spPr>
+          <a:xfrm>
+            <a:off x="640080" y="4206240"/>
+            <a:ext cx="10972800" cy="822960"/>
+          </a:xfrm>
+          <a:prstGeom prst="rect">
+            <a:avLst/>
+          </a:prstGeom>
+          <a:noFill/>
+          <a:ln/>
+        </p:spPr>
+        <p:txBody>
+          <a:bodyPr wrap="square" lIns="0" tIns="0" rIns="0" bIns="0" rtlCol="0" anchor="ctr"/>
+          <a:lstStyle/>
+          <a:p>
+            <a:pPr indent="0" marL="0">
+              <a:buNone/>
+            </a:pPr>
+            <a:r>
+              <a:rPr lang="en-US" sz="1800" dirty="0">
+                <a:solidFill>
+                  <a:srgbClr val="94A3B8"/>
+                </a:solidFill>
+                <a:latin typeface="Calibri" pitchFamily="34" charset="0"/>
+                <a:ea typeface="Calibri" pitchFamily="34" charset="-122"/>
+                <a:cs typeface="Calibri" pitchFamily="34" charset="-120"/>
+              </a:rPr>
+              <a:t>Part 1 — Pay · Ingest · Calculate · Earn</a:t>
+            </a:r>
+            <a:endParaRPr lang="en-US" sz="1800" dirty="0"/>
+          </a:p>
+          <a:p>
+            <a:pPr indent="0" marL="0">
+              <a:buNone/>
+            </a:pPr>
+            <a:r>
+              <a:rPr lang="en-US" sz="1800" dirty="0">
+                <a:solidFill>
+                  <a:srgbClr val="94A3B8"/>
+                </a:solidFill>
+                <a:latin typeface="Calibri" pitchFamily="34" charset="0"/>
+                <a:ea typeface="Calibri" pitchFamily="34" charset="-122"/>
+                <a:cs typeface="Calibri" pitchFamily="34" charset="-120"/>
+              </a:rPr>
+              <a:t>Part 2 — Member result · Burn / redeem · summary cards</a:t>
+            </a:r>
+            <a:endParaRPr lang="en-US" sz="1800" dirty="0"/>
+          </a:p>
+        </p:txBody>
+      </p:sp>
+    </p:spTree>
+  </p:cSld>
+  <p:clrMapOvr>
+    <a:masterClrMapping/>
+  </p:clrMapOvr>
+</p:sld>
+</file>
+
+<file path=ppt/slides/slide14.xml><?xml version="1.0" encoding="utf-8"?>
+<p:sld xmlns:a="http://schemas.openxmlformats.org/drawingml/2006/main" xmlns:r="http://schemas.openxmlformats.org/officeDocument/2006/relationships" xmlns:p="http://schemas.openxmlformats.org/presentationml/2006/main">
+  <p:cSld name="Slide 14">
+    <p:spTree>
+      <p:nvGrpSpPr>
+        <p:cNvPr id="1" name=""/>
+        <p:cNvGrpSpPr/>
+        <p:nvPr/>
+      </p:nvGrpSpPr>
+      <p:grpSpPr>
+        <a:xfrm>
+          <a:off x="0" y="0"/>
+          <a:ext cx="0" cy="0"/>
+          <a:chOff x="0" y="0"/>
+          <a:chExt cx="0" cy="0"/>
+        </a:xfrm>
+      </p:grpSpPr>
+      <p:sp>
+        <p:nvSpPr>
+          <p:cNvPr id="2" name="Shape 0"/>
+          <p:cNvSpPr/>
+          <p:nvPr/>
+        </p:nvSpPr>
+        <p:spPr>
+          <a:xfrm>
+            <a:off x="0" y="0"/>
+            <a:ext cx="12161520" cy="6858000"/>
+          </a:xfrm>
+          <a:prstGeom prst="rect">
+            <a:avLst/>
+          </a:prstGeom>
+          <a:solidFill>
+            <a:srgbClr val="0B1220"/>
+          </a:solidFill>
+          <a:ln/>
+        </p:spPr>
+      </p:sp>
+      <p:sp>
+        <p:nvSpPr>
+          <p:cNvPr id="3" name="Text 1"/>
+          <p:cNvSpPr/>
+          <p:nvPr/>
+        </p:nvSpPr>
+        <p:spPr>
+          <a:xfrm>
+            <a:off x="365760" y="137160"/>
+            <a:ext cx="11430000" cy="320040"/>
+          </a:xfrm>
+          <a:prstGeom prst="rect">
+            <a:avLst/>
+          </a:prstGeom>
+          <a:noFill/>
+          <a:ln/>
+        </p:spPr>
+        <p:txBody>
+          <a:bodyPr wrap="square" lIns="0" tIns="0" rIns="0" bIns="0" rtlCol="0" anchor="ctr"/>
+          <a:lstStyle/>
+          <a:p>
+            <a:pPr indent="0" marL="0">
+              <a:buNone/>
+            </a:pPr>
+            <a:r>
+              <a:rPr lang="en-US" sz="1300" b="1" dirty="0">
+                <a:solidFill>
+                  <a:srgbClr val="14B8A6"/>
+                </a:solidFill>
+                <a:latin typeface="Calibri" pitchFamily="34" charset="0"/>
+                <a:ea typeface="Calibri" pitchFamily="34" charset="-122"/>
+                <a:cs typeface="Calibri" pitchFamily="34" charset="-120"/>
+              </a:rPr>
+              <a:t>APPENDIX A1  ·  Sequence board (1/2)  ·  Transaction → Earn</a:t>
+            </a:r>
+            <a:endParaRPr lang="en-US" sz="1300" dirty="0"/>
+          </a:p>
+        </p:txBody>
+      </p:sp>
+      <p:pic>
+        <p:nvPicPr>
+          <p:cNvPr id="4" name="Image 0" descr="/Users/wayneyu/Documents/git/personal/ledger-engine/docs/decks/uaf-earn-burn-appendix-1.png">    </p:cNvPr>
+          <p:cNvPicPr>
+            <a:picLocks noChangeAspect="1"/>
+          </p:cNvPicPr>
+          <p:nvPr/>
+        </p:nvPicPr>
+        <p:blipFill>
+          <a:blip r:embed="rId1"/>
+          <a:stretch>
+            <a:fillRect/>
+          </a:stretch>
+        </p:blipFill>
+        <p:spPr>
+          <a:xfrm>
+            <a:off x="777240" y="502920"/>
+            <a:ext cx="10607040" cy="5989320"/>
+          </a:xfrm>
+          <a:prstGeom prst="rect">
+            <a:avLst/>
+          </a:prstGeom>
+        </p:spPr>
+      </p:pic>
+    </p:spTree>
+  </p:cSld>
+  <p:clrMapOvr>
+    <a:masterClrMapping/>
+  </p:clrMapOvr>
+</p:sld>
+</file>
+
+<file path=ppt/slides/slide15.xml><?xml version="1.0" encoding="utf-8"?>
+<p:sld xmlns:a="http://schemas.openxmlformats.org/drawingml/2006/main" xmlns:r="http://schemas.openxmlformats.org/officeDocument/2006/relationships" xmlns:p="http://schemas.openxmlformats.org/presentationml/2006/main">
+  <p:cSld name="Slide 15">
+    <p:spTree>
+      <p:nvGrpSpPr>
+        <p:cNvPr id="1" name=""/>
+        <p:cNvGrpSpPr/>
+        <p:nvPr/>
+      </p:nvGrpSpPr>
+      <p:grpSpPr>
+        <a:xfrm>
+          <a:off x="0" y="0"/>
+          <a:ext cx="0" cy="0"/>
+          <a:chOff x="0" y="0"/>
+          <a:chExt cx="0" cy="0"/>
+        </a:xfrm>
+      </p:grpSpPr>
+      <p:sp>
+        <p:nvSpPr>
+          <p:cNvPr id="2" name="Shape 0"/>
+          <p:cNvSpPr/>
+          <p:nvPr/>
+        </p:nvSpPr>
+        <p:spPr>
+          <a:xfrm>
+            <a:off x="0" y="0"/>
+            <a:ext cx="12161520" cy="6858000"/>
+          </a:xfrm>
+          <a:prstGeom prst="rect">
+            <a:avLst/>
+          </a:prstGeom>
+          <a:solidFill>
+            <a:srgbClr val="0B1220"/>
+          </a:solidFill>
+          <a:ln/>
+        </p:spPr>
+      </p:sp>
+      <p:sp>
+        <p:nvSpPr>
+          <p:cNvPr id="3" name="Text 1"/>
+          <p:cNvSpPr/>
+          <p:nvPr/>
+        </p:nvSpPr>
+        <p:spPr>
+          <a:xfrm>
+            <a:off x="365760" y="137160"/>
+            <a:ext cx="11430000" cy="320040"/>
+          </a:xfrm>
+          <a:prstGeom prst="rect">
+            <a:avLst/>
+          </a:prstGeom>
+          <a:noFill/>
+          <a:ln/>
+        </p:spPr>
+        <p:txBody>
+          <a:bodyPr wrap="square" lIns="0" tIns="0" rIns="0" bIns="0" rtlCol="0" anchor="ctr"/>
+          <a:lstStyle/>
+          <a:p>
+            <a:pPr indent="0" marL="0">
+              <a:buNone/>
+            </a:pPr>
+            <a:r>
+              <a:rPr lang="en-US" sz="1300" b="1" dirty="0">
+                <a:solidFill>
+                  <a:srgbClr val="14B8A6"/>
+                </a:solidFill>
+                <a:latin typeface="Calibri" pitchFamily="34" charset="0"/>
+                <a:ea typeface="Calibri" pitchFamily="34" charset="-122"/>
+                <a:cs typeface="Calibri" pitchFamily="34" charset="-120"/>
+              </a:rPr>
+              <a:t>APPENDIX A2  ·  Sequence board (2/2)  ·  Result → Burn + summary</a:t>
+            </a:r>
+            <a:endParaRPr lang="en-US" sz="1300" dirty="0"/>
+          </a:p>
+        </p:txBody>
+      </p:sp>
+      <p:pic>
+        <p:nvPicPr>
+          <p:cNvPr id="4" name="Image 0" descr="/Users/wayneyu/Documents/git/personal/ledger-engine/docs/decks/uaf-earn-burn-appendix-2.png">    </p:cNvPr>
+          <p:cNvPicPr>
+            <a:picLocks noChangeAspect="1"/>
+          </p:cNvPicPr>
+          <p:nvPr/>
+        </p:nvPicPr>
+        <p:blipFill>
+          <a:blip r:embed="rId1"/>
+          <a:stretch>
+            <a:fillRect/>
+          </a:stretch>
+        </p:blipFill>
+        <p:spPr>
+          <a:xfrm>
+            <a:off x="777240" y="502920"/>
+            <a:ext cx="10607040" cy="5989320"/>
+          </a:xfrm>
+          <a:prstGeom prst="rect">
+            <a:avLst/>
+          </a:prstGeom>
+        </p:spPr>
+      </p:pic>
     </p:spTree>
   </p:cSld>
   <p:clrMapOvr>
@@ -4246,7 +4835,7 @@
                 <a:ea typeface="Calibri" pitchFamily="34" charset="-122"/>
                 <a:cs typeface="Calibri" pitchFamily="34" charset="-120"/>
               </a:rPr>
-              <a:t>How we will walk the story</a:t>
+              <a:t>How we walk the story</a:t>
             </a:r>
             <a:endParaRPr lang="en-US" sz="2800" dirty="0"/>
           </a:p>
@@ -4254,53 +4843,14 @@
       </p:sp>
       <p:sp>
         <p:nvSpPr>
-          <p:cNvPr id="4" name="Text 2"/>
-          <p:cNvSpPr/>
-          <p:nvPr/>
-        </p:nvSpPr>
-        <p:spPr>
-          <a:xfrm>
-            <a:off x="548640" y="914400"/>
-            <a:ext cx="10972800" cy="320040"/>
-          </a:xfrm>
-          <a:prstGeom prst="rect">
-            <a:avLst/>
-          </a:prstGeom>
-          <a:noFill/>
-          <a:ln/>
-        </p:spPr>
-        <p:txBody>
-          <a:bodyPr wrap="square" lIns="0" tIns="0" rIns="0" bIns="0" rtlCol="0" anchor="ctr"/>
-          <a:lstStyle/>
-          <a:p>
-            <a:pPr indent="0" marL="0">
-              <a:buNone/>
-            </a:pPr>
-            <a:r>
-              <a:rPr lang="en-US" sz="1600" dirty="0">
-                <a:solidFill>
-                  <a:srgbClr val="64748B"/>
-                </a:solidFill>
-                <a:latin typeface="Calibri" pitchFamily="34" charset="0"/>
-                <a:ea typeface="Calibri" pitchFamily="34" charset="-122"/>
-                <a:cs typeface="Calibri" pitchFamily="34" charset="-120"/>
-              </a:rPr>
-              <a:t>Five beats — each beat has its own slides</a:t>
-            </a:r>
-            <a:endParaRPr lang="en-US" sz="1600" dirty="0"/>
-          </a:p>
-        </p:txBody>
-      </p:sp>
-      <p:sp>
-        <p:nvSpPr>
-          <p:cNvPr id="5" name="Shape 3"/>
-          <p:cNvSpPr/>
-          <p:nvPr/>
-        </p:nvSpPr>
-        <p:spPr>
-          <a:xfrm>
-            <a:off x="502920" y="1828800"/>
-            <a:ext cx="2194560" cy="3840480"/>
+          <p:cNvPr id="4" name="Shape 2"/>
+          <p:cNvSpPr/>
+          <p:nvPr/>
+        </p:nvSpPr>
+        <p:spPr>
+          <a:xfrm>
+            <a:off x="502920" y="1645920"/>
+            <a:ext cx="2194560" cy="4023360"/>
           </a:xfrm>
           <a:prstGeom prst="roundRect">
             <a:avLst>
@@ -4322,13 +4872,13 @@
       </p:sp>
       <p:sp>
         <p:nvSpPr>
-          <p:cNvPr id="6" name="Shape 4"/>
-          <p:cNvSpPr/>
-          <p:nvPr/>
-        </p:nvSpPr>
-        <p:spPr>
-          <a:xfrm>
-            <a:off x="1143000" y="2194560"/>
+          <p:cNvPr id="5" name="Shape 3"/>
+          <p:cNvSpPr/>
+          <p:nvPr/>
+        </p:nvSpPr>
+        <p:spPr>
+          <a:xfrm>
+            <a:off x="1143000" y="2103120"/>
             <a:ext cx="914400" cy="914400"/>
           </a:xfrm>
           <a:prstGeom prst="ellipse">
@@ -4342,46 +4892,46 @@
       </p:sp>
       <p:sp>
         <p:nvSpPr>
+          <p:cNvPr id="6" name="Text 4"/>
+          <p:cNvSpPr/>
+          <p:nvPr/>
+        </p:nvSpPr>
+        <p:spPr>
+          <a:xfrm>
+            <a:off x="1143000" y="2286000"/>
+            <a:ext cx="914400" cy="594360"/>
+          </a:xfrm>
+          <a:prstGeom prst="rect">
+            <a:avLst/>
+          </a:prstGeom>
+          <a:noFill/>
+          <a:ln/>
+        </p:spPr>
+        <p:txBody>
+          <a:bodyPr wrap="square" lIns="0" tIns="0" rIns="0" bIns="0" rtlCol="0" anchor="ctr"/>
+          <a:lstStyle/>
+          <a:p>
+            <a:pPr algn="ctr" indent="0" marL="0">
+              <a:buNone/>
+            </a:pPr>
+            <a:r>
+              <a:rPr lang="en-US" sz="2800" b="1" dirty="0">
+                <a:solidFill>
+                  <a:srgbClr val="FFFFFF"/>
+                </a:solidFill>
+                <a:latin typeface="Calibri" pitchFamily="34" charset="0"/>
+                <a:ea typeface="Calibri" pitchFamily="34" charset="-122"/>
+                <a:cs typeface="Calibri" pitchFamily="34" charset="-120"/>
+              </a:rPr>
+              <a:t>A</a:t>
+            </a:r>
+            <a:endParaRPr lang="en-US" sz="2800" dirty="0"/>
+          </a:p>
+        </p:txBody>
+      </p:sp>
+      <p:sp>
+        <p:nvSpPr>
           <p:cNvPr id="7" name="Text 5"/>
-          <p:cNvSpPr/>
-          <p:nvPr/>
-        </p:nvSpPr>
-        <p:spPr>
-          <a:xfrm>
-            <a:off x="1143000" y="2377440"/>
-            <a:ext cx="914400" cy="594360"/>
-          </a:xfrm>
-          <a:prstGeom prst="rect">
-            <a:avLst/>
-          </a:prstGeom>
-          <a:noFill/>
-          <a:ln/>
-        </p:spPr>
-        <p:txBody>
-          <a:bodyPr wrap="square" lIns="0" tIns="0" rIns="0" bIns="0" rtlCol="0" anchor="ctr"/>
-          <a:lstStyle/>
-          <a:p>
-            <a:pPr algn="ctr" indent="0" marL="0">
-              <a:buNone/>
-            </a:pPr>
-            <a:r>
-              <a:rPr lang="en-US" sz="2800" b="1" dirty="0">
-                <a:solidFill>
-                  <a:srgbClr val="FFFFFF"/>
-                </a:solidFill>
-                <a:latin typeface="Calibri" pitchFamily="34" charset="0"/>
-                <a:ea typeface="Calibri" pitchFamily="34" charset="-122"/>
-                <a:cs typeface="Calibri" pitchFamily="34" charset="-120"/>
-              </a:rPr>
-              <a:t>A</a:t>
-            </a:r>
-            <a:endParaRPr lang="en-US" sz="2800" dirty="0"/>
-          </a:p>
-        </p:txBody>
-      </p:sp>
-      <p:sp>
-        <p:nvSpPr>
-          <p:cNvPr id="8" name="Text 6"/>
           <p:cNvSpPr/>
           <p:nvPr/>
         </p:nvSpPr>
@@ -4420,14 +4970,14 @@
       </p:sp>
       <p:sp>
         <p:nvSpPr>
-          <p:cNvPr id="9" name="Text 7"/>
+          <p:cNvPr id="8" name="Text 6"/>
           <p:cNvSpPr/>
           <p:nvPr/>
         </p:nvSpPr>
         <p:spPr>
           <a:xfrm>
             <a:off x="640080" y="4114800"/>
-            <a:ext cx="1920240" cy="1097280"/>
+            <a:ext cx="1920240" cy="914400"/>
           </a:xfrm>
           <a:prstGeom prst="rect">
             <a:avLst/>
@@ -4451,39 +5001,22 @@
                 <a:ea typeface="Calibri" pitchFamily="34" charset="-122"/>
                 <a:cs typeface="Calibri" pitchFamily="34" charset="-120"/>
               </a:rPr>
-              <a:t>Customer</a:t>
+              <a:t>Customer → Channel</a:t>
             </a:r>
             <a:endParaRPr lang="en-US" sz="1600" dirty="0"/>
           </a:p>
-          <a:p>
-            <a:pPr algn="ctr" indent="0" marL="0">
-              <a:buNone/>
-            </a:pPr>
-            <a:r>
-              <a:rPr lang="en-US" sz="1600" dirty="0">
-                <a:solidFill>
-                  <a:srgbClr val="334155"/>
-                </a:solidFill>
-                <a:latin typeface="Calibri" pitchFamily="34" charset="0"/>
-                <a:ea typeface="Calibri" pitchFamily="34" charset="-122"/>
-                <a:cs typeface="Calibri" pitchFamily="34" charset="-120"/>
-              </a:rPr>
-              <a:t>→ Channel</a:t>
-            </a:r>
-            <a:endParaRPr lang="en-US" sz="1600" dirty="0"/>
-          </a:p>
-        </p:txBody>
-      </p:sp>
-      <p:sp>
-        <p:nvSpPr>
-          <p:cNvPr id="10" name="Shape 8"/>
-          <p:cNvSpPr/>
-          <p:nvPr/>
-        </p:nvSpPr>
-        <p:spPr>
-          <a:xfrm>
-            <a:off x="2834640" y="1828800"/>
-            <a:ext cx="2194560" cy="3840480"/>
+        </p:txBody>
+      </p:sp>
+      <p:sp>
+        <p:nvSpPr>
+          <p:cNvPr id="9" name="Shape 7"/>
+          <p:cNvSpPr/>
+          <p:nvPr/>
+        </p:nvSpPr>
+        <p:spPr>
+          <a:xfrm>
+            <a:off x="2834640" y="1645920"/>
+            <a:ext cx="2194560" cy="4023360"/>
           </a:xfrm>
           <a:prstGeom prst="roundRect">
             <a:avLst>
@@ -4505,13 +5038,13 @@
       </p:sp>
       <p:sp>
         <p:nvSpPr>
-          <p:cNvPr id="11" name="Shape 9"/>
-          <p:cNvSpPr/>
-          <p:nvPr/>
-        </p:nvSpPr>
-        <p:spPr>
-          <a:xfrm>
-            <a:off x="3474720" y="2194560"/>
+          <p:cNvPr id="10" name="Shape 8"/>
+          <p:cNvSpPr/>
+          <p:nvPr/>
+        </p:nvSpPr>
+        <p:spPr>
+          <a:xfrm>
+            <a:off x="3474720" y="2103120"/>
             <a:ext cx="914400" cy="914400"/>
           </a:xfrm>
           <a:prstGeom prst="ellipse">
@@ -4525,46 +5058,46 @@
       </p:sp>
       <p:sp>
         <p:nvSpPr>
+          <p:cNvPr id="11" name="Text 9"/>
+          <p:cNvSpPr/>
+          <p:nvPr/>
+        </p:nvSpPr>
+        <p:spPr>
+          <a:xfrm>
+            <a:off x="3474720" y="2286000"/>
+            <a:ext cx="914400" cy="594360"/>
+          </a:xfrm>
+          <a:prstGeom prst="rect">
+            <a:avLst/>
+          </a:prstGeom>
+          <a:noFill/>
+          <a:ln/>
+        </p:spPr>
+        <p:txBody>
+          <a:bodyPr wrap="square" lIns="0" tIns="0" rIns="0" bIns="0" rtlCol="0" anchor="ctr"/>
+          <a:lstStyle/>
+          <a:p>
+            <a:pPr algn="ctr" indent="0" marL="0">
+              <a:buNone/>
+            </a:pPr>
+            <a:r>
+              <a:rPr lang="en-US" sz="2800" b="1" dirty="0">
+                <a:solidFill>
+                  <a:srgbClr val="FFFFFF"/>
+                </a:solidFill>
+                <a:latin typeface="Calibri" pitchFamily="34" charset="0"/>
+                <a:ea typeface="Calibri" pitchFamily="34" charset="-122"/>
+                <a:cs typeface="Calibri" pitchFamily="34" charset="-120"/>
+              </a:rPr>
+              <a:t>B</a:t>
+            </a:r>
+            <a:endParaRPr lang="en-US" sz="2800" dirty="0"/>
+          </a:p>
+        </p:txBody>
+      </p:sp>
+      <p:sp>
+        <p:nvSpPr>
           <p:cNvPr id="12" name="Text 10"/>
-          <p:cNvSpPr/>
-          <p:nvPr/>
-        </p:nvSpPr>
-        <p:spPr>
-          <a:xfrm>
-            <a:off x="3474720" y="2377440"/>
-            <a:ext cx="914400" cy="594360"/>
-          </a:xfrm>
-          <a:prstGeom prst="rect">
-            <a:avLst/>
-          </a:prstGeom>
-          <a:noFill/>
-          <a:ln/>
-        </p:spPr>
-        <p:txBody>
-          <a:bodyPr wrap="square" lIns="0" tIns="0" rIns="0" bIns="0" rtlCol="0" anchor="ctr"/>
-          <a:lstStyle/>
-          <a:p>
-            <a:pPr algn="ctr" indent="0" marL="0">
-              <a:buNone/>
-            </a:pPr>
-            <a:r>
-              <a:rPr lang="en-US" sz="2800" b="1" dirty="0">
-                <a:solidFill>
-                  <a:srgbClr val="FFFFFF"/>
-                </a:solidFill>
-                <a:latin typeface="Calibri" pitchFamily="34" charset="0"/>
-                <a:ea typeface="Calibri" pitchFamily="34" charset="-122"/>
-                <a:cs typeface="Calibri" pitchFamily="34" charset="-120"/>
-              </a:rPr>
-              <a:t>B</a:t>
-            </a:r>
-            <a:endParaRPr lang="en-US" sz="2800" dirty="0"/>
-          </a:p>
-        </p:txBody>
-      </p:sp>
-      <p:sp>
-        <p:nvSpPr>
-          <p:cNvPr id="13" name="Text 11"/>
           <p:cNvSpPr/>
           <p:nvPr/>
         </p:nvSpPr>
@@ -4603,14 +5136,14 @@
       </p:sp>
       <p:sp>
         <p:nvSpPr>
-          <p:cNvPr id="14" name="Text 12"/>
+          <p:cNvPr id="13" name="Text 11"/>
           <p:cNvSpPr/>
           <p:nvPr/>
         </p:nvSpPr>
         <p:spPr>
           <a:xfrm>
             <a:off x="2971800" y="4114800"/>
-            <a:ext cx="1920240" cy="1097280"/>
+            <a:ext cx="1920240" cy="914400"/>
           </a:xfrm>
           <a:prstGeom prst="rect">
             <a:avLst/>
@@ -4634,39 +5167,22 @@
                 <a:ea typeface="Calibri" pitchFamily="34" charset="-122"/>
                 <a:cs typeface="Calibri" pitchFamily="34" charset="-120"/>
               </a:rPr>
-              <a:t>cc-xapi</a:t>
+              <a:t>xapi → SDK → Door</a:t>
             </a:r>
             <a:endParaRPr lang="en-US" sz="1600" dirty="0"/>
           </a:p>
-          <a:p>
-            <a:pPr algn="ctr" indent="0" marL="0">
-              <a:buNone/>
-            </a:pPr>
-            <a:r>
-              <a:rPr lang="en-US" sz="1600" dirty="0">
-                <a:solidFill>
-                  <a:srgbClr val="334155"/>
-                </a:solidFill>
-                <a:latin typeface="Calibri" pitchFamily="34" charset="0"/>
-                <a:ea typeface="Calibri" pitchFamily="34" charset="-122"/>
-                <a:cs typeface="Calibri" pitchFamily="34" charset="-120"/>
-              </a:rPr>
-              <a:t>→ SDK → Door</a:t>
-            </a:r>
-            <a:endParaRPr lang="en-US" sz="1600" dirty="0"/>
-          </a:p>
-        </p:txBody>
-      </p:sp>
-      <p:sp>
-        <p:nvSpPr>
-          <p:cNvPr id="15" name="Shape 13"/>
-          <p:cNvSpPr/>
-          <p:nvPr/>
-        </p:nvSpPr>
-        <p:spPr>
-          <a:xfrm>
-            <a:off x="5166360" y="1828800"/>
-            <a:ext cx="2194560" cy="3840480"/>
+        </p:txBody>
+      </p:sp>
+      <p:sp>
+        <p:nvSpPr>
+          <p:cNvPr id="14" name="Shape 12"/>
+          <p:cNvSpPr/>
+          <p:nvPr/>
+        </p:nvSpPr>
+        <p:spPr>
+          <a:xfrm>
+            <a:off x="5166360" y="1645920"/>
+            <a:ext cx="2194560" cy="4023360"/>
           </a:xfrm>
           <a:prstGeom prst="roundRect">
             <a:avLst>
@@ -4688,13 +5204,13 @@
       </p:sp>
       <p:sp>
         <p:nvSpPr>
-          <p:cNvPr id="16" name="Shape 14"/>
-          <p:cNvSpPr/>
-          <p:nvPr/>
-        </p:nvSpPr>
-        <p:spPr>
-          <a:xfrm>
-            <a:off x="5806440" y="2194560"/>
+          <p:cNvPr id="15" name="Shape 13"/>
+          <p:cNvSpPr/>
+          <p:nvPr/>
+        </p:nvSpPr>
+        <p:spPr>
+          <a:xfrm>
+            <a:off x="5806440" y="2103120"/>
             <a:ext cx="914400" cy="914400"/>
           </a:xfrm>
           <a:prstGeom prst="ellipse">
@@ -4708,46 +5224,46 @@
       </p:sp>
       <p:sp>
         <p:nvSpPr>
+          <p:cNvPr id="16" name="Text 14"/>
+          <p:cNvSpPr/>
+          <p:nvPr/>
+        </p:nvSpPr>
+        <p:spPr>
+          <a:xfrm>
+            <a:off x="5806440" y="2286000"/>
+            <a:ext cx="914400" cy="594360"/>
+          </a:xfrm>
+          <a:prstGeom prst="rect">
+            <a:avLst/>
+          </a:prstGeom>
+          <a:noFill/>
+          <a:ln/>
+        </p:spPr>
+        <p:txBody>
+          <a:bodyPr wrap="square" lIns="0" tIns="0" rIns="0" bIns="0" rtlCol="0" anchor="ctr"/>
+          <a:lstStyle/>
+          <a:p>
+            <a:pPr algn="ctr" indent="0" marL="0">
+              <a:buNone/>
+            </a:pPr>
+            <a:r>
+              <a:rPr lang="en-US" sz="2800" b="1" dirty="0">
+                <a:solidFill>
+                  <a:srgbClr val="FFFFFF"/>
+                </a:solidFill>
+                <a:latin typeface="Calibri" pitchFamily="34" charset="0"/>
+                <a:ea typeface="Calibri" pitchFamily="34" charset="-122"/>
+                <a:cs typeface="Calibri" pitchFamily="34" charset="-120"/>
+              </a:rPr>
+              <a:t>C</a:t>
+            </a:r>
+            <a:endParaRPr lang="en-US" sz="2800" dirty="0"/>
+          </a:p>
+        </p:txBody>
+      </p:sp>
+      <p:sp>
+        <p:nvSpPr>
           <p:cNvPr id="17" name="Text 15"/>
-          <p:cNvSpPr/>
-          <p:nvPr/>
-        </p:nvSpPr>
-        <p:spPr>
-          <a:xfrm>
-            <a:off x="5806440" y="2377440"/>
-            <a:ext cx="914400" cy="594360"/>
-          </a:xfrm>
-          <a:prstGeom prst="rect">
-            <a:avLst/>
-          </a:prstGeom>
-          <a:noFill/>
-          <a:ln/>
-        </p:spPr>
-        <p:txBody>
-          <a:bodyPr wrap="square" lIns="0" tIns="0" rIns="0" bIns="0" rtlCol="0" anchor="ctr"/>
-          <a:lstStyle/>
-          <a:p>
-            <a:pPr algn="ctr" indent="0" marL="0">
-              <a:buNone/>
-            </a:pPr>
-            <a:r>
-              <a:rPr lang="en-US" sz="2800" b="1" dirty="0">
-                <a:solidFill>
-                  <a:srgbClr val="FFFFFF"/>
-                </a:solidFill>
-                <a:latin typeface="Calibri" pitchFamily="34" charset="0"/>
-                <a:ea typeface="Calibri" pitchFamily="34" charset="-122"/>
-                <a:cs typeface="Calibri" pitchFamily="34" charset="-120"/>
-              </a:rPr>
-              <a:t>C</a:t>
-            </a:r>
-            <a:endParaRPr lang="en-US" sz="2800" dirty="0"/>
-          </a:p>
-        </p:txBody>
-      </p:sp>
-      <p:sp>
-        <p:nvSpPr>
-          <p:cNvPr id="18" name="Text 16"/>
           <p:cNvSpPr/>
           <p:nvPr/>
         </p:nvSpPr>
@@ -4786,14 +5302,14 @@
       </p:sp>
       <p:sp>
         <p:nvSpPr>
-          <p:cNvPr id="19" name="Text 17"/>
+          <p:cNvPr id="18" name="Text 16"/>
           <p:cNvSpPr/>
           <p:nvPr/>
         </p:nvSpPr>
         <p:spPr>
           <a:xfrm>
             <a:off x="5303520" y="4114800"/>
-            <a:ext cx="1920240" cy="1097280"/>
+            <a:ext cx="1920240" cy="914400"/>
           </a:xfrm>
           <a:prstGeom prst="rect">
             <a:avLst/>
@@ -4817,39 +5333,22 @@
                 <a:ea typeface="Calibri" pitchFamily="34" charset="-122"/>
                 <a:cs typeface="Calibri" pitchFamily="34" charset="-120"/>
               </a:rPr>
-              <a:t>Brain</a:t>
+              <a:t>Brain 500 × 1%</a:t>
             </a:r>
             <a:endParaRPr lang="en-US" sz="1600" dirty="0"/>
           </a:p>
-          <a:p>
-            <a:pPr algn="ctr" indent="0" marL="0">
-              <a:buNone/>
-            </a:pPr>
-            <a:r>
-              <a:rPr lang="en-US" sz="1600" dirty="0">
-                <a:solidFill>
-                  <a:srgbClr val="334155"/>
-                </a:solidFill>
-                <a:latin typeface="Calibri" pitchFamily="34" charset="0"/>
-                <a:ea typeface="Calibri" pitchFamily="34" charset="-122"/>
-                <a:cs typeface="Calibri" pitchFamily="34" charset="-120"/>
-              </a:rPr>
-              <a:t>500 × 1%</a:t>
-            </a:r>
-            <a:endParaRPr lang="en-US" sz="1600" dirty="0"/>
-          </a:p>
-        </p:txBody>
-      </p:sp>
-      <p:sp>
-        <p:nvSpPr>
-          <p:cNvPr id="20" name="Shape 18"/>
-          <p:cNvSpPr/>
-          <p:nvPr/>
-        </p:nvSpPr>
-        <p:spPr>
-          <a:xfrm>
-            <a:off x="7498080" y="1828800"/>
-            <a:ext cx="2194560" cy="3840480"/>
+        </p:txBody>
+      </p:sp>
+      <p:sp>
+        <p:nvSpPr>
+          <p:cNvPr id="19" name="Shape 17"/>
+          <p:cNvSpPr/>
+          <p:nvPr/>
+        </p:nvSpPr>
+        <p:spPr>
+          <a:xfrm>
+            <a:off x="7498080" y="1645920"/>
+            <a:ext cx="2194560" cy="4023360"/>
           </a:xfrm>
           <a:prstGeom prst="roundRect">
             <a:avLst>
@@ -4871,13 +5370,13 @@
       </p:sp>
       <p:sp>
         <p:nvSpPr>
-          <p:cNvPr id="21" name="Shape 19"/>
-          <p:cNvSpPr/>
-          <p:nvPr/>
-        </p:nvSpPr>
-        <p:spPr>
-          <a:xfrm>
-            <a:off x="8138160" y="2194560"/>
+          <p:cNvPr id="20" name="Shape 18"/>
+          <p:cNvSpPr/>
+          <p:nvPr/>
+        </p:nvSpPr>
+        <p:spPr>
+          <a:xfrm>
+            <a:off x="8138160" y="2103120"/>
             <a:ext cx="914400" cy="914400"/>
           </a:xfrm>
           <a:prstGeom prst="ellipse">
@@ -4891,46 +5390,46 @@
       </p:sp>
       <p:sp>
         <p:nvSpPr>
+          <p:cNvPr id="21" name="Text 19"/>
+          <p:cNvSpPr/>
+          <p:nvPr/>
+        </p:nvSpPr>
+        <p:spPr>
+          <a:xfrm>
+            <a:off x="8138160" y="2286000"/>
+            <a:ext cx="914400" cy="594360"/>
+          </a:xfrm>
+          <a:prstGeom prst="rect">
+            <a:avLst/>
+          </a:prstGeom>
+          <a:noFill/>
+          <a:ln/>
+        </p:spPr>
+        <p:txBody>
+          <a:bodyPr wrap="square" lIns="0" tIns="0" rIns="0" bIns="0" rtlCol="0" anchor="ctr"/>
+          <a:lstStyle/>
+          <a:p>
+            <a:pPr algn="ctr" indent="0" marL="0">
+              <a:buNone/>
+            </a:pPr>
+            <a:r>
+              <a:rPr lang="en-US" sz="2800" b="1" dirty="0">
+                <a:solidFill>
+                  <a:srgbClr val="FFFFFF"/>
+                </a:solidFill>
+                <a:latin typeface="Calibri" pitchFamily="34" charset="0"/>
+                <a:ea typeface="Calibri" pitchFamily="34" charset="-122"/>
+                <a:cs typeface="Calibri" pitchFamily="34" charset="-120"/>
+              </a:rPr>
+              <a:t>D</a:t>
+            </a:r>
+            <a:endParaRPr lang="en-US" sz="2800" dirty="0"/>
+          </a:p>
+        </p:txBody>
+      </p:sp>
+      <p:sp>
+        <p:nvSpPr>
           <p:cNvPr id="22" name="Text 20"/>
-          <p:cNvSpPr/>
-          <p:nvPr/>
-        </p:nvSpPr>
-        <p:spPr>
-          <a:xfrm>
-            <a:off x="8138160" y="2377440"/>
-            <a:ext cx="914400" cy="594360"/>
-          </a:xfrm>
-          <a:prstGeom prst="rect">
-            <a:avLst/>
-          </a:prstGeom>
-          <a:noFill/>
-          <a:ln/>
-        </p:spPr>
-        <p:txBody>
-          <a:bodyPr wrap="square" lIns="0" tIns="0" rIns="0" bIns="0" rtlCol="0" anchor="ctr"/>
-          <a:lstStyle/>
-          <a:p>
-            <a:pPr algn="ctr" indent="0" marL="0">
-              <a:buNone/>
-            </a:pPr>
-            <a:r>
-              <a:rPr lang="en-US" sz="2800" b="1" dirty="0">
-                <a:solidFill>
-                  <a:srgbClr val="FFFFFF"/>
-                </a:solidFill>
-                <a:latin typeface="Calibri" pitchFamily="34" charset="0"/>
-                <a:ea typeface="Calibri" pitchFamily="34" charset="-122"/>
-                <a:cs typeface="Calibri" pitchFamily="34" charset="-120"/>
-              </a:rPr>
-              <a:t>D</a:t>
-            </a:r>
-            <a:endParaRPr lang="en-US" sz="2800" dirty="0"/>
-          </a:p>
-        </p:txBody>
-      </p:sp>
-      <p:sp>
-        <p:nvSpPr>
-          <p:cNvPr id="23" name="Text 21"/>
           <p:cNvSpPr/>
           <p:nvPr/>
         </p:nvSpPr>
@@ -4969,14 +5468,14 @@
       </p:sp>
       <p:sp>
         <p:nvSpPr>
-          <p:cNvPr id="24" name="Text 22"/>
+          <p:cNvPr id="23" name="Text 21"/>
           <p:cNvSpPr/>
           <p:nvPr/>
         </p:nvSpPr>
         <p:spPr>
           <a:xfrm>
             <a:off x="7635240" y="4114800"/>
-            <a:ext cx="1920240" cy="1097280"/>
+            <a:ext cx="1920240" cy="914400"/>
           </a:xfrm>
           <a:prstGeom prst="rect">
             <a:avLst/>
@@ -5000,39 +5499,22 @@
                 <a:ea typeface="Calibri" pitchFamily="34" charset="-122"/>
                 <a:cs typeface="Calibri" pitchFamily="34" charset="-120"/>
               </a:rPr>
-              <a:t>Books DE</a:t>
+              <a:t>Books +5 LP</a:t>
             </a:r>
             <a:endParaRPr lang="en-US" sz="1600" dirty="0"/>
           </a:p>
-          <a:p>
-            <a:pPr algn="ctr" indent="0" marL="0">
-              <a:buNone/>
-            </a:pPr>
-            <a:r>
-              <a:rPr lang="en-US" sz="1600" dirty="0">
-                <a:solidFill>
-                  <a:srgbClr val="334155"/>
-                </a:solidFill>
-                <a:latin typeface="Calibri" pitchFamily="34" charset="0"/>
-                <a:ea typeface="Calibri" pitchFamily="34" charset="-122"/>
-                <a:cs typeface="Calibri" pitchFamily="34" charset="-120"/>
-              </a:rPr>
-              <a:t>+5 LP</a:t>
-            </a:r>
-            <a:endParaRPr lang="en-US" sz="1600" dirty="0"/>
-          </a:p>
-        </p:txBody>
-      </p:sp>
-      <p:sp>
-        <p:nvSpPr>
-          <p:cNvPr id="25" name="Shape 23"/>
-          <p:cNvSpPr/>
-          <p:nvPr/>
-        </p:nvSpPr>
-        <p:spPr>
-          <a:xfrm>
-            <a:off x="9829800" y="1828800"/>
-            <a:ext cx="2194560" cy="3840480"/>
+        </p:txBody>
+      </p:sp>
+      <p:sp>
+        <p:nvSpPr>
+          <p:cNvPr id="24" name="Shape 22"/>
+          <p:cNvSpPr/>
+          <p:nvPr/>
+        </p:nvSpPr>
+        <p:spPr>
+          <a:xfrm>
+            <a:off x="9829800" y="1645920"/>
+            <a:ext cx="2194560" cy="4023360"/>
           </a:xfrm>
           <a:prstGeom prst="roundRect">
             <a:avLst>
@@ -5054,13 +5536,13 @@
       </p:sp>
       <p:sp>
         <p:nvSpPr>
-          <p:cNvPr id="26" name="Shape 24"/>
-          <p:cNvSpPr/>
-          <p:nvPr/>
-        </p:nvSpPr>
-        <p:spPr>
-          <a:xfrm>
-            <a:off x="10469880" y="2194560"/>
+          <p:cNvPr id="25" name="Shape 23"/>
+          <p:cNvSpPr/>
+          <p:nvPr/>
+        </p:nvSpPr>
+        <p:spPr>
+          <a:xfrm>
+            <a:off x="10469880" y="2103120"/>
             <a:ext cx="914400" cy="914400"/>
           </a:xfrm>
           <a:prstGeom prst="ellipse">
@@ -5074,46 +5556,46 @@
       </p:sp>
       <p:sp>
         <p:nvSpPr>
+          <p:cNvPr id="26" name="Text 24"/>
+          <p:cNvSpPr/>
+          <p:nvPr/>
+        </p:nvSpPr>
+        <p:spPr>
+          <a:xfrm>
+            <a:off x="10469880" y="2286000"/>
+            <a:ext cx="914400" cy="594360"/>
+          </a:xfrm>
+          <a:prstGeom prst="rect">
+            <a:avLst/>
+          </a:prstGeom>
+          <a:noFill/>
+          <a:ln/>
+        </p:spPr>
+        <p:txBody>
+          <a:bodyPr wrap="square" lIns="0" tIns="0" rIns="0" bIns="0" rtlCol="0" anchor="ctr"/>
+          <a:lstStyle/>
+          <a:p>
+            <a:pPr algn="ctr" indent="0" marL="0">
+              <a:buNone/>
+            </a:pPr>
+            <a:r>
+              <a:rPr lang="en-US" sz="2800" b="1" dirty="0">
+                <a:solidFill>
+                  <a:srgbClr val="FFFFFF"/>
+                </a:solidFill>
+                <a:latin typeface="Calibri" pitchFamily="34" charset="0"/>
+                <a:ea typeface="Calibri" pitchFamily="34" charset="-122"/>
+                <a:cs typeface="Calibri" pitchFamily="34" charset="-120"/>
+              </a:rPr>
+              <a:t>E</a:t>
+            </a:r>
+            <a:endParaRPr lang="en-US" sz="2800" dirty="0"/>
+          </a:p>
+        </p:txBody>
+      </p:sp>
+      <p:sp>
+        <p:nvSpPr>
           <p:cNvPr id="27" name="Text 25"/>
-          <p:cNvSpPr/>
-          <p:nvPr/>
-        </p:nvSpPr>
-        <p:spPr>
-          <a:xfrm>
-            <a:off x="10469880" y="2377440"/>
-            <a:ext cx="914400" cy="594360"/>
-          </a:xfrm>
-          <a:prstGeom prst="rect">
-            <a:avLst/>
-          </a:prstGeom>
-          <a:noFill/>
-          <a:ln/>
-        </p:spPr>
-        <p:txBody>
-          <a:bodyPr wrap="square" lIns="0" tIns="0" rIns="0" bIns="0" rtlCol="0" anchor="ctr"/>
-          <a:lstStyle/>
-          <a:p>
-            <a:pPr algn="ctr" indent="0" marL="0">
-              <a:buNone/>
-            </a:pPr>
-            <a:r>
-              <a:rPr lang="en-US" sz="2800" b="1" dirty="0">
-                <a:solidFill>
-                  <a:srgbClr val="FFFFFF"/>
-                </a:solidFill>
-                <a:latin typeface="Calibri" pitchFamily="34" charset="0"/>
-                <a:ea typeface="Calibri" pitchFamily="34" charset="-122"/>
-                <a:cs typeface="Calibri" pitchFamily="34" charset="-120"/>
-              </a:rPr>
-              <a:t>E</a:t>
-            </a:r>
-            <a:endParaRPr lang="en-US" sz="2800" dirty="0"/>
-          </a:p>
-        </p:txBody>
-      </p:sp>
-      <p:sp>
-        <p:nvSpPr>
-          <p:cNvPr id="28" name="Text 26"/>
           <p:cNvSpPr/>
           <p:nvPr/>
         </p:nvSpPr>
@@ -5152,63 +5634,46 @@
       </p:sp>
       <p:sp>
         <p:nvSpPr>
+          <p:cNvPr id="28" name="Text 26"/>
+          <p:cNvSpPr/>
+          <p:nvPr/>
+        </p:nvSpPr>
+        <p:spPr>
+          <a:xfrm>
+            <a:off x="9966960" y="4114800"/>
+            <a:ext cx="1920240" cy="914400"/>
+          </a:xfrm>
+          <a:prstGeom prst="rect">
+            <a:avLst/>
+          </a:prstGeom>
+          <a:noFill/>
+          <a:ln/>
+        </p:spPr>
+        <p:txBody>
+          <a:bodyPr wrap="square" lIns="0" tIns="0" rIns="0" bIns="0" rtlCol="0" anchor="ctr"/>
+          <a:lstStyle/>
+          <a:p>
+            <a:pPr algn="ctr" indent="0" marL="0">
+              <a:buNone/>
+            </a:pPr>
+            <a:r>
+              <a:rPr lang="en-US" sz="1600" dirty="0">
+                <a:solidFill>
+                  <a:srgbClr val="334155"/>
+                </a:solidFill>
+                <a:latin typeface="Calibri" pitchFamily="34" charset="0"/>
+                <a:ea typeface="Calibri" pitchFamily="34" charset="-122"/>
+                <a:cs typeface="Calibri" pitchFamily="34" charset="-120"/>
+              </a:rPr>
+              <a:t>Redeem −5 LP</a:t>
+            </a:r>
+            <a:endParaRPr lang="en-US" sz="1600" dirty="0"/>
+          </a:p>
+        </p:txBody>
+      </p:sp>
+      <p:sp>
+        <p:nvSpPr>
           <p:cNvPr id="29" name="Text 27"/>
-          <p:cNvSpPr/>
-          <p:nvPr/>
-        </p:nvSpPr>
-        <p:spPr>
-          <a:xfrm>
-            <a:off x="9966960" y="4114800"/>
-            <a:ext cx="1920240" cy="1097280"/>
-          </a:xfrm>
-          <a:prstGeom prst="rect">
-            <a:avLst/>
-          </a:prstGeom>
-          <a:noFill/>
-          <a:ln/>
-        </p:spPr>
-        <p:txBody>
-          <a:bodyPr wrap="square" lIns="0" tIns="0" rIns="0" bIns="0" rtlCol="0" anchor="ctr"/>
-          <a:lstStyle/>
-          <a:p>
-            <a:pPr algn="ctr" indent="0" marL="0">
-              <a:buNone/>
-            </a:pPr>
-            <a:r>
-              <a:rPr lang="en-US" sz="1600" dirty="0">
-                <a:solidFill>
-                  <a:srgbClr val="334155"/>
-                </a:solidFill>
-                <a:latin typeface="Calibri" pitchFamily="34" charset="0"/>
-                <a:ea typeface="Calibri" pitchFamily="34" charset="-122"/>
-                <a:cs typeface="Calibri" pitchFamily="34" charset="-120"/>
-              </a:rPr>
-              <a:t>Redeem</a:t>
-            </a:r>
-            <a:endParaRPr lang="en-US" sz="1600" dirty="0"/>
-          </a:p>
-          <a:p>
-            <a:pPr algn="ctr" indent="0" marL="0">
-              <a:buNone/>
-            </a:pPr>
-            <a:r>
-              <a:rPr lang="en-US" sz="1600" dirty="0">
-                <a:solidFill>
-                  <a:srgbClr val="334155"/>
-                </a:solidFill>
-                <a:latin typeface="Calibri" pitchFamily="34" charset="0"/>
-                <a:ea typeface="Calibri" pitchFamily="34" charset="-122"/>
-                <a:cs typeface="Calibri" pitchFamily="34" charset="-120"/>
-              </a:rPr>
-              <a:t>−5 LP</a:t>
-            </a:r>
-            <a:endParaRPr lang="en-US" sz="1600" dirty="0"/>
-          </a:p>
-        </p:txBody>
-      </p:sp>
-      <p:sp>
-        <p:nvSpPr>
-          <p:cNvPr id="30" name="Text 28"/>
           <p:cNvSpPr/>
           <p:nvPr/>
         </p:nvSpPr>
@@ -5247,7 +5712,7 @@
       </p:sp>
       <p:sp>
         <p:nvSpPr>
-          <p:cNvPr id="31" name="Text 29"/>
+          <p:cNvPr id="30" name="Text 28"/>
           <p:cNvSpPr/>
           <p:nvPr/>
         </p:nvSpPr>
@@ -5278,7 +5743,7 @@
                 <a:ea typeface="Calibri" pitchFamily="34" charset="-122"/>
                 <a:cs typeface="Calibri" pitchFamily="34" charset="-120"/>
               </a:rPr>
-              <a:t>2 / 12</a:t>
+              <a:t>2 / 15</a:t>
             </a:r>
             <a:endParaRPr lang="en-US" sz="1100" dirty="0"/>
           </a:p>
@@ -5921,7 +6386,7 @@
                 <a:ea typeface="Calibri" pitchFamily="34" charset="-122"/>
                 <a:cs typeface="Calibri" pitchFamily="34" charset="-120"/>
               </a:rPr>
-              <a:t>txn-88 (unique)</a:t>
+              <a:t>txn-88</a:t>
             </a:r>
             <a:endParaRPr lang="en-US" sz="2400" dirty="0"/>
           </a:p>
@@ -5999,7 +6464,7 @@
                 <a:ea typeface="Calibri" pitchFamily="34" charset="-122"/>
                 <a:cs typeface="Calibri" pitchFamily="34" charset="-120"/>
               </a:rPr>
-              <a:t>3 / 12</a:t>
+              <a:t>3 / 15</a:t>
             </a:r>
             <a:endParaRPr lang="en-US" sz="1100" dirty="0"/>
           </a:p>
@@ -6105,7 +6570,7 @@
                 <a:ea typeface="Calibri" pitchFamily="34" charset="-122"/>
                 <a:cs typeface="Calibri" pitchFamily="34" charset="-120"/>
               </a:rPr>
-              <a:t>A · PAY  —  into existing edge</a:t>
+              <a:t>A · PAY  —  existing edge</a:t>
             </a:r>
             <a:endParaRPr lang="en-US" sz="1600" dirty="0"/>
           </a:p>
@@ -6459,7 +6924,7 @@
                 <a:ea typeface="Calibri" pitchFamily="34" charset="-122"/>
                 <a:cs typeface="Calibri" pitchFamily="34" charset="-120"/>
               </a:rPr>
-              <a:t>→   Next hop: Internal IT calls LedgeRX Java SDK</a:t>
+              <a:t>→   Next: Internal IT calls LedgeRX Java SDK</a:t>
             </a:r>
             <a:endParaRPr lang="en-US" sz="2000" dirty="0"/>
           </a:p>
@@ -6537,7 +7002,7 @@
                 <a:ea typeface="Calibri" pitchFamily="34" charset="-122"/>
                 <a:cs typeface="Calibri" pitchFamily="34" charset="-120"/>
               </a:rPr>
-              <a:t>4 / 12</a:t>
+              <a:t>4 / 15</a:t>
             </a:r>
             <a:endParaRPr lang="en-US" sz="1100" dirty="0"/>
           </a:p>
@@ -6643,7 +7108,7 @@
                 <a:ea typeface="Calibri" pitchFamily="34" charset="-122"/>
                 <a:cs typeface="Calibri" pitchFamily="34" charset="-120"/>
               </a:rPr>
-              <a:t>B · INGEST  —  Internal IT integration</a:t>
+              <a:t>B · INGEST  —  Internal IT</a:t>
             </a:r>
             <a:endParaRPr lang="en-US" sz="1600" dirty="0"/>
           </a:p>
@@ -6788,52 +7253,13 @@
       </p:sp>
       <p:sp>
         <p:nvSpPr>
-          <p:cNvPr id="9" name="Text 7"/>
-          <p:cNvSpPr/>
-          <p:nvPr/>
-        </p:nvSpPr>
-        <p:spPr>
-          <a:xfrm>
-            <a:off x="640080" y="2331720"/>
-            <a:ext cx="10972800" cy="365760"/>
-          </a:xfrm>
-          <a:prstGeom prst="rect">
-            <a:avLst/>
-          </a:prstGeom>
-          <a:noFill/>
-          <a:ln/>
-        </p:spPr>
-        <p:txBody>
-          <a:bodyPr wrap="square" lIns="0" tIns="0" rIns="0" bIns="0" rtlCol="0" anchor="ctr"/>
-          <a:lstStyle/>
-          <a:p>
-            <a:pPr indent="0" marL="0">
-              <a:buNone/>
-            </a:pPr>
-            <a:r>
-              <a:rPr lang="en-US" sz="1600" dirty="0">
-                <a:solidFill>
-                  <a:srgbClr val="64748B"/>
-                </a:solidFill>
-                <a:latin typeface="Calibri" pitchFamily="34" charset="0"/>
-                <a:ea typeface="Calibri" pitchFamily="34" charset="-122"/>
-                <a:cs typeface="Calibri" pitchFamily="34" charset="-120"/>
-              </a:rPr>
-              <a:t>TransactionalEvent sent into LedgeRX</a:t>
-            </a:r>
-            <a:endParaRPr lang="en-US" sz="1600" dirty="0"/>
-          </a:p>
-        </p:txBody>
-      </p:sp>
-      <p:sp>
-        <p:nvSpPr>
-          <p:cNvPr id="10" name="Shape 8"/>
-          <p:cNvSpPr/>
-          <p:nvPr/>
-        </p:nvSpPr>
-        <p:spPr>
-          <a:xfrm>
-            <a:off x="640080" y="2880360"/>
+          <p:cNvPr id="9" name="Shape 7"/>
+          <p:cNvSpPr/>
+          <p:nvPr/>
+        </p:nvSpPr>
+        <p:spPr>
+          <a:xfrm>
+            <a:off x="640080" y="2743200"/>
             <a:ext cx="3611880" cy="1325880"/>
           </a:xfrm>
           <a:prstGeom prst="roundRect">
@@ -6849,52 +7275,52 @@
       </p:sp>
       <p:sp>
         <p:nvSpPr>
+          <p:cNvPr id="10" name="Text 8"/>
+          <p:cNvSpPr/>
+          <p:nvPr/>
+        </p:nvSpPr>
+        <p:spPr>
+          <a:xfrm>
+            <a:off x="914400" y="3017520"/>
+            <a:ext cx="3063240" cy="320040"/>
+          </a:xfrm>
+          <a:prstGeom prst="rect">
+            <a:avLst/>
+          </a:prstGeom>
+          <a:noFill/>
+          <a:ln/>
+        </p:spPr>
+        <p:txBody>
+          <a:bodyPr wrap="square" lIns="0" tIns="0" rIns="0" bIns="0" rtlCol="0" anchor="ctr"/>
+          <a:lstStyle/>
+          <a:p>
+            <a:pPr indent="0" marL="0">
+              <a:buNone/>
+            </a:pPr>
+            <a:r>
+              <a:rPr lang="en-US" sz="1400" dirty="0">
+                <a:solidFill>
+                  <a:srgbClr val="64748B"/>
+                </a:solidFill>
+                <a:latin typeface="Calibri" pitchFamily="34" charset="0"/>
+                <a:ea typeface="Calibri" pitchFamily="34" charset="-122"/>
+                <a:cs typeface="Calibri" pitchFamily="34" charset="-120"/>
+              </a:rPr>
+              <a:t>eventType</a:t>
+            </a:r>
+            <a:endParaRPr lang="en-US" sz="1400" dirty="0"/>
+          </a:p>
+        </p:txBody>
+      </p:sp>
+      <p:sp>
+        <p:nvSpPr>
           <p:cNvPr id="11" name="Text 9"/>
           <p:cNvSpPr/>
           <p:nvPr/>
         </p:nvSpPr>
         <p:spPr>
           <a:xfrm>
-            <a:off x="914400" y="3154680"/>
-            <a:ext cx="3063240" cy="320040"/>
-          </a:xfrm>
-          <a:prstGeom prst="rect">
-            <a:avLst/>
-          </a:prstGeom>
-          <a:noFill/>
-          <a:ln/>
-        </p:spPr>
-        <p:txBody>
-          <a:bodyPr wrap="square" lIns="0" tIns="0" rIns="0" bIns="0" rtlCol="0" anchor="ctr"/>
-          <a:lstStyle/>
-          <a:p>
-            <a:pPr indent="0" marL="0">
-              <a:buNone/>
-            </a:pPr>
-            <a:r>
-              <a:rPr lang="en-US" sz="1400" dirty="0">
-                <a:solidFill>
-                  <a:srgbClr val="64748B"/>
-                </a:solidFill>
-                <a:latin typeface="Calibri" pitchFamily="34" charset="0"/>
-                <a:ea typeface="Calibri" pitchFamily="34" charset="-122"/>
-                <a:cs typeface="Calibri" pitchFamily="34" charset="-120"/>
-              </a:rPr>
-              <a:t>eventType</a:t>
-            </a:r>
-            <a:endParaRPr lang="en-US" sz="1400" dirty="0"/>
-          </a:p>
-        </p:txBody>
-      </p:sp>
-      <p:sp>
-        <p:nvSpPr>
-          <p:cNvPr id="12" name="Text 10"/>
-          <p:cNvSpPr/>
-          <p:nvPr/>
-        </p:nvSpPr>
-        <p:spPr>
-          <a:xfrm>
-            <a:off x="914400" y="3566160"/>
+            <a:off x="914400" y="3429000"/>
             <a:ext cx="3063240" cy="411480"/>
           </a:xfrm>
           <a:prstGeom prst="rect">
@@ -6927,13 +7353,13 @@
       </p:sp>
       <p:sp>
         <p:nvSpPr>
-          <p:cNvPr id="13" name="Shape 11"/>
-          <p:cNvSpPr/>
-          <p:nvPr/>
-        </p:nvSpPr>
-        <p:spPr>
-          <a:xfrm>
-            <a:off x="4434840" y="2880360"/>
+          <p:cNvPr id="12" name="Shape 10"/>
+          <p:cNvSpPr/>
+          <p:nvPr/>
+        </p:nvSpPr>
+        <p:spPr>
+          <a:xfrm>
+            <a:off x="4434840" y="2743200"/>
             <a:ext cx="3611880" cy="1325880"/>
           </a:xfrm>
           <a:prstGeom prst="roundRect">
@@ -6949,52 +7375,52 @@
       </p:sp>
       <p:sp>
         <p:nvSpPr>
+          <p:cNvPr id="13" name="Text 11"/>
+          <p:cNvSpPr/>
+          <p:nvPr/>
+        </p:nvSpPr>
+        <p:spPr>
+          <a:xfrm>
+            <a:off x="4709160" y="3017520"/>
+            <a:ext cx="3063240" cy="320040"/>
+          </a:xfrm>
+          <a:prstGeom prst="rect">
+            <a:avLst/>
+          </a:prstGeom>
+          <a:noFill/>
+          <a:ln/>
+        </p:spPr>
+        <p:txBody>
+          <a:bodyPr wrap="square" lIns="0" tIns="0" rIns="0" bIns="0" rtlCol="0" anchor="ctr"/>
+          <a:lstStyle/>
+          <a:p>
+            <a:pPr indent="0" marL="0">
+              <a:buNone/>
+            </a:pPr>
+            <a:r>
+              <a:rPr lang="en-US" sz="1400" dirty="0">
+                <a:solidFill>
+                  <a:srgbClr val="64748B"/>
+                </a:solidFill>
+                <a:latin typeface="Calibri" pitchFamily="34" charset="0"/>
+                <a:ea typeface="Calibri" pitchFamily="34" charset="-122"/>
+                <a:cs typeface="Calibri" pitchFamily="34" charset="-120"/>
+              </a:rPr>
+              <a:t>amount</a:t>
+            </a:r>
+            <a:endParaRPr lang="en-US" sz="1400" dirty="0"/>
+          </a:p>
+        </p:txBody>
+      </p:sp>
+      <p:sp>
+        <p:nvSpPr>
           <p:cNvPr id="14" name="Text 12"/>
           <p:cNvSpPr/>
           <p:nvPr/>
         </p:nvSpPr>
         <p:spPr>
           <a:xfrm>
-            <a:off x="4709160" y="3154680"/>
-            <a:ext cx="3063240" cy="320040"/>
-          </a:xfrm>
-          <a:prstGeom prst="rect">
-            <a:avLst/>
-          </a:prstGeom>
-          <a:noFill/>
-          <a:ln/>
-        </p:spPr>
-        <p:txBody>
-          <a:bodyPr wrap="square" lIns="0" tIns="0" rIns="0" bIns="0" rtlCol="0" anchor="ctr"/>
-          <a:lstStyle/>
-          <a:p>
-            <a:pPr indent="0" marL="0">
-              <a:buNone/>
-            </a:pPr>
-            <a:r>
-              <a:rPr lang="en-US" sz="1400" dirty="0">
-                <a:solidFill>
-                  <a:srgbClr val="64748B"/>
-                </a:solidFill>
-                <a:latin typeface="Calibri" pitchFamily="34" charset="0"/>
-                <a:ea typeface="Calibri" pitchFamily="34" charset="-122"/>
-                <a:cs typeface="Calibri" pitchFamily="34" charset="-120"/>
-              </a:rPr>
-              <a:t>amount</a:t>
-            </a:r>
-            <a:endParaRPr lang="en-US" sz="1400" dirty="0"/>
-          </a:p>
-        </p:txBody>
-      </p:sp>
-      <p:sp>
-        <p:nvSpPr>
-          <p:cNvPr id="15" name="Text 13"/>
-          <p:cNvSpPr/>
-          <p:nvPr/>
-        </p:nvSpPr>
-        <p:spPr>
-          <a:xfrm>
-            <a:off x="4709160" y="3566160"/>
+            <a:off x="4709160" y="3429000"/>
             <a:ext cx="3063240" cy="411480"/>
           </a:xfrm>
           <a:prstGeom prst="rect">
@@ -7027,13 +7453,13 @@
       </p:sp>
       <p:sp>
         <p:nvSpPr>
-          <p:cNvPr id="16" name="Shape 14"/>
-          <p:cNvSpPr/>
-          <p:nvPr/>
-        </p:nvSpPr>
-        <p:spPr>
-          <a:xfrm>
-            <a:off x="8229600" y="2880360"/>
+          <p:cNvPr id="15" name="Shape 13"/>
+          <p:cNvSpPr/>
+          <p:nvPr/>
+        </p:nvSpPr>
+        <p:spPr>
+          <a:xfrm>
+            <a:off x="8229600" y="2743200"/>
             <a:ext cx="3611880" cy="1325880"/>
           </a:xfrm>
           <a:prstGeom prst="roundRect">
@@ -7049,52 +7475,52 @@
       </p:sp>
       <p:sp>
         <p:nvSpPr>
+          <p:cNvPr id="16" name="Text 14"/>
+          <p:cNvSpPr/>
+          <p:nvPr/>
+        </p:nvSpPr>
+        <p:spPr>
+          <a:xfrm>
+            <a:off x="8503920" y="3017520"/>
+            <a:ext cx="3063240" cy="320040"/>
+          </a:xfrm>
+          <a:prstGeom prst="rect">
+            <a:avLst/>
+          </a:prstGeom>
+          <a:noFill/>
+          <a:ln/>
+        </p:spPr>
+        <p:txBody>
+          <a:bodyPr wrap="square" lIns="0" tIns="0" rIns="0" bIns="0" rtlCol="0" anchor="ctr"/>
+          <a:lstStyle/>
+          <a:p>
+            <a:pPr indent="0" marL="0">
+              <a:buNone/>
+            </a:pPr>
+            <a:r>
+              <a:rPr lang="en-US" sz="1400" dirty="0">
+                <a:solidFill>
+                  <a:srgbClr val="64748B"/>
+                </a:solidFill>
+                <a:latin typeface="Calibri" pitchFamily="34" charset="0"/>
+                <a:ea typeface="Calibri" pitchFamily="34" charset="-122"/>
+                <a:cs typeface="Calibri" pitchFamily="34" charset="-120"/>
+              </a:rPr>
+              <a:t>currency</a:t>
+            </a:r>
+            <a:endParaRPr lang="en-US" sz="1400" dirty="0"/>
+          </a:p>
+        </p:txBody>
+      </p:sp>
+      <p:sp>
+        <p:nvSpPr>
           <p:cNvPr id="17" name="Text 15"/>
           <p:cNvSpPr/>
           <p:nvPr/>
         </p:nvSpPr>
         <p:spPr>
           <a:xfrm>
-            <a:off x="8503920" y="3154680"/>
-            <a:ext cx="3063240" cy="320040"/>
-          </a:xfrm>
-          <a:prstGeom prst="rect">
-            <a:avLst/>
-          </a:prstGeom>
-          <a:noFill/>
-          <a:ln/>
-        </p:spPr>
-        <p:txBody>
-          <a:bodyPr wrap="square" lIns="0" tIns="0" rIns="0" bIns="0" rtlCol="0" anchor="ctr"/>
-          <a:lstStyle/>
-          <a:p>
-            <a:pPr indent="0" marL="0">
-              <a:buNone/>
-            </a:pPr>
-            <a:r>
-              <a:rPr lang="en-US" sz="1400" dirty="0">
-                <a:solidFill>
-                  <a:srgbClr val="64748B"/>
-                </a:solidFill>
-                <a:latin typeface="Calibri" pitchFamily="34" charset="0"/>
-                <a:ea typeface="Calibri" pitchFamily="34" charset="-122"/>
-                <a:cs typeface="Calibri" pitchFamily="34" charset="-120"/>
-              </a:rPr>
-              <a:t>currency</a:t>
-            </a:r>
-            <a:endParaRPr lang="en-US" sz="1400" dirty="0"/>
-          </a:p>
-        </p:txBody>
-      </p:sp>
-      <p:sp>
-        <p:nvSpPr>
-          <p:cNvPr id="18" name="Text 16"/>
-          <p:cNvSpPr/>
-          <p:nvPr/>
-        </p:nvSpPr>
-        <p:spPr>
-          <a:xfrm>
-            <a:off x="8503920" y="3566160"/>
+            <a:off x="8503920" y="3429000"/>
             <a:ext cx="3063240" cy="411480"/>
           </a:xfrm>
           <a:prstGeom prst="rect">
@@ -7127,13 +7553,13 @@
       </p:sp>
       <p:sp>
         <p:nvSpPr>
-          <p:cNvPr id="19" name="Shape 17"/>
-          <p:cNvSpPr/>
-          <p:nvPr/>
-        </p:nvSpPr>
-        <p:spPr>
-          <a:xfrm>
-            <a:off x="640080" y="4434840"/>
+          <p:cNvPr id="18" name="Shape 16"/>
+          <p:cNvSpPr/>
+          <p:nvPr/>
+        </p:nvSpPr>
+        <p:spPr>
+          <a:xfrm>
+            <a:off x="640080" y="4297680"/>
             <a:ext cx="3611880" cy="1325880"/>
           </a:xfrm>
           <a:prstGeom prst="roundRect">
@@ -7149,52 +7575,52 @@
       </p:sp>
       <p:sp>
         <p:nvSpPr>
+          <p:cNvPr id="19" name="Text 17"/>
+          <p:cNvSpPr/>
+          <p:nvPr/>
+        </p:nvSpPr>
+        <p:spPr>
+          <a:xfrm>
+            <a:off x="914400" y="4572000"/>
+            <a:ext cx="3063240" cy="320040"/>
+          </a:xfrm>
+          <a:prstGeom prst="rect">
+            <a:avLst/>
+          </a:prstGeom>
+          <a:noFill/>
+          <a:ln/>
+        </p:spPr>
+        <p:txBody>
+          <a:bodyPr wrap="square" lIns="0" tIns="0" rIns="0" bIns="0" rtlCol="0" anchor="ctr"/>
+          <a:lstStyle/>
+          <a:p>
+            <a:pPr indent="0" marL="0">
+              <a:buNone/>
+            </a:pPr>
+            <a:r>
+              <a:rPr lang="en-US" sz="1400" dirty="0">
+                <a:solidFill>
+                  <a:srgbClr val="64748B"/>
+                </a:solidFill>
+                <a:latin typeface="Calibri" pitchFamily="34" charset="0"/>
+                <a:ea typeface="Calibri" pitchFamily="34" charset="-122"/>
+                <a:cs typeface="Calibri" pitchFamily="34" charset="-120"/>
+              </a:rPr>
+              <a:t>metadata.mcc</a:t>
+            </a:r>
+            <a:endParaRPr lang="en-US" sz="1400" dirty="0"/>
+          </a:p>
+        </p:txBody>
+      </p:sp>
+      <p:sp>
+        <p:nvSpPr>
           <p:cNvPr id="20" name="Text 18"/>
           <p:cNvSpPr/>
           <p:nvPr/>
         </p:nvSpPr>
         <p:spPr>
           <a:xfrm>
-            <a:off x="914400" y="4709160"/>
-            <a:ext cx="3063240" cy="320040"/>
-          </a:xfrm>
-          <a:prstGeom prst="rect">
-            <a:avLst/>
-          </a:prstGeom>
-          <a:noFill/>
-          <a:ln/>
-        </p:spPr>
-        <p:txBody>
-          <a:bodyPr wrap="square" lIns="0" tIns="0" rIns="0" bIns="0" rtlCol="0" anchor="ctr"/>
-          <a:lstStyle/>
-          <a:p>
-            <a:pPr indent="0" marL="0">
-              <a:buNone/>
-            </a:pPr>
-            <a:r>
-              <a:rPr lang="en-US" sz="1400" dirty="0">
-                <a:solidFill>
-                  <a:srgbClr val="64748B"/>
-                </a:solidFill>
-                <a:latin typeface="Calibri" pitchFamily="34" charset="0"/>
-                <a:ea typeface="Calibri" pitchFamily="34" charset="-122"/>
-                <a:cs typeface="Calibri" pitchFamily="34" charset="-120"/>
-              </a:rPr>
-              <a:t>metadata.mcc</a:t>
-            </a:r>
-            <a:endParaRPr lang="en-US" sz="1400" dirty="0"/>
-          </a:p>
-        </p:txBody>
-      </p:sp>
-      <p:sp>
-        <p:nvSpPr>
-          <p:cNvPr id="21" name="Text 19"/>
-          <p:cNvSpPr/>
-          <p:nvPr/>
-        </p:nvSpPr>
-        <p:spPr>
-          <a:xfrm>
-            <a:off x="914400" y="5120640"/>
+            <a:off x="914400" y="4983480"/>
             <a:ext cx="3063240" cy="411480"/>
           </a:xfrm>
           <a:prstGeom prst="rect">
@@ -7227,13 +7653,13 @@
       </p:sp>
       <p:sp>
         <p:nvSpPr>
-          <p:cNvPr id="22" name="Shape 20"/>
-          <p:cNvSpPr/>
-          <p:nvPr/>
-        </p:nvSpPr>
-        <p:spPr>
-          <a:xfrm>
-            <a:off x="4434840" y="4434840"/>
+          <p:cNvPr id="21" name="Shape 19"/>
+          <p:cNvSpPr/>
+          <p:nvPr/>
+        </p:nvSpPr>
+        <p:spPr>
+          <a:xfrm>
+            <a:off x="4434840" y="4297680"/>
             <a:ext cx="3611880" cy="1325880"/>
           </a:xfrm>
           <a:prstGeom prst="roundRect">
@@ -7249,52 +7675,52 @@
       </p:sp>
       <p:sp>
         <p:nvSpPr>
+          <p:cNvPr id="22" name="Text 20"/>
+          <p:cNvSpPr/>
+          <p:nvPr/>
+        </p:nvSpPr>
+        <p:spPr>
+          <a:xfrm>
+            <a:off x="4709160" y="4572000"/>
+            <a:ext cx="3063240" cy="320040"/>
+          </a:xfrm>
+          <a:prstGeom prst="rect">
+            <a:avLst/>
+          </a:prstGeom>
+          <a:noFill/>
+          <a:ln/>
+        </p:spPr>
+        <p:txBody>
+          <a:bodyPr wrap="square" lIns="0" tIns="0" rIns="0" bIns="0" rtlCol="0" anchor="ctr"/>
+          <a:lstStyle/>
+          <a:p>
+            <a:pPr indent="0" marL="0">
+              <a:buNone/>
+            </a:pPr>
+            <a:r>
+              <a:rPr lang="en-US" sz="1400" dirty="0">
+                <a:solidFill>
+                  <a:srgbClr val="64748B"/>
+                </a:solidFill>
+                <a:latin typeface="Calibri" pitchFamily="34" charset="0"/>
+                <a:ea typeface="Calibri" pitchFamily="34" charset="-122"/>
+                <a:cs typeface="Calibri" pitchFamily="34" charset="-120"/>
+              </a:rPr>
+              <a:t>coaProfile</a:t>
+            </a:r>
+            <a:endParaRPr lang="en-US" sz="1400" dirty="0"/>
+          </a:p>
+        </p:txBody>
+      </p:sp>
+      <p:sp>
+        <p:nvSpPr>
           <p:cNvPr id="23" name="Text 21"/>
           <p:cNvSpPr/>
           <p:nvPr/>
         </p:nvSpPr>
         <p:spPr>
           <a:xfrm>
-            <a:off x="4709160" y="4709160"/>
-            <a:ext cx="3063240" cy="320040"/>
-          </a:xfrm>
-          <a:prstGeom prst="rect">
-            <a:avLst/>
-          </a:prstGeom>
-          <a:noFill/>
-          <a:ln/>
-        </p:spPr>
-        <p:txBody>
-          <a:bodyPr wrap="square" lIns="0" tIns="0" rIns="0" bIns="0" rtlCol="0" anchor="ctr"/>
-          <a:lstStyle/>
-          <a:p>
-            <a:pPr indent="0" marL="0">
-              <a:buNone/>
-            </a:pPr>
-            <a:r>
-              <a:rPr lang="en-US" sz="1400" dirty="0">
-                <a:solidFill>
-                  <a:srgbClr val="64748B"/>
-                </a:solidFill>
-                <a:latin typeface="Calibri" pitchFamily="34" charset="0"/>
-                <a:ea typeface="Calibri" pitchFamily="34" charset="-122"/>
-                <a:cs typeface="Calibri" pitchFamily="34" charset="-120"/>
-              </a:rPr>
-              <a:t>coaProfile</a:t>
-            </a:r>
-            <a:endParaRPr lang="en-US" sz="1400" dirty="0"/>
-          </a:p>
-        </p:txBody>
-      </p:sp>
-      <p:sp>
-        <p:nvSpPr>
-          <p:cNvPr id="24" name="Text 22"/>
-          <p:cNvSpPr/>
-          <p:nvPr/>
-        </p:nvSpPr>
-        <p:spPr>
-          <a:xfrm>
-            <a:off x="4709160" y="5120640"/>
+            <a:off x="4709160" y="4983480"/>
             <a:ext cx="3063240" cy="411480"/>
           </a:xfrm>
           <a:prstGeom prst="rect">
@@ -7327,13 +7753,13 @@
       </p:sp>
       <p:sp>
         <p:nvSpPr>
-          <p:cNvPr id="25" name="Shape 23"/>
-          <p:cNvSpPr/>
-          <p:nvPr/>
-        </p:nvSpPr>
-        <p:spPr>
-          <a:xfrm>
-            <a:off x="8229600" y="4434840"/>
+          <p:cNvPr id="24" name="Shape 22"/>
+          <p:cNvSpPr/>
+          <p:nvPr/>
+        </p:nvSpPr>
+        <p:spPr>
+          <a:xfrm>
+            <a:off x="8229600" y="4297680"/>
             <a:ext cx="3611880" cy="1325880"/>
           </a:xfrm>
           <a:prstGeom prst="roundRect">
@@ -7349,85 +7775,85 @@
       </p:sp>
       <p:sp>
         <p:nvSpPr>
+          <p:cNvPr id="25" name="Text 23"/>
+          <p:cNvSpPr/>
+          <p:nvPr/>
+        </p:nvSpPr>
+        <p:spPr>
+          <a:xfrm>
+            <a:off x="8503920" y="4572000"/>
+            <a:ext cx="3063240" cy="320040"/>
+          </a:xfrm>
+          <a:prstGeom prst="rect">
+            <a:avLst/>
+          </a:prstGeom>
+          <a:noFill/>
+          <a:ln/>
+        </p:spPr>
+        <p:txBody>
+          <a:bodyPr wrap="square" lIns="0" tIns="0" rIns="0" bIns="0" rtlCol="0" anchor="ctr"/>
+          <a:lstStyle/>
+          <a:p>
+            <a:pPr indent="0" marL="0">
+              <a:buNone/>
+            </a:pPr>
+            <a:r>
+              <a:rPr lang="en-US" sz="1400" dirty="0">
+                <a:solidFill>
+                  <a:srgbClr val="64748B"/>
+                </a:solidFill>
+                <a:latin typeface="Calibri" pitchFamily="34" charset="0"/>
+                <a:ea typeface="Calibri" pitchFamily="34" charset="-122"/>
+                <a:cs typeface="Calibri" pitchFamily="34" charset="-120"/>
+              </a:rPr>
+              <a:t>eventId</a:t>
+            </a:r>
+            <a:endParaRPr lang="en-US" sz="1400" dirty="0"/>
+          </a:p>
+        </p:txBody>
+      </p:sp>
+      <p:sp>
+        <p:nvSpPr>
           <p:cNvPr id="26" name="Text 24"/>
           <p:cNvSpPr/>
           <p:nvPr/>
         </p:nvSpPr>
         <p:spPr>
           <a:xfrm>
-            <a:off x="8503920" y="4709160"/>
-            <a:ext cx="3063240" cy="320040"/>
-          </a:xfrm>
-          <a:prstGeom prst="rect">
-            <a:avLst/>
-          </a:prstGeom>
-          <a:noFill/>
-          <a:ln/>
-        </p:spPr>
-        <p:txBody>
-          <a:bodyPr wrap="square" lIns="0" tIns="0" rIns="0" bIns="0" rtlCol="0" anchor="ctr"/>
-          <a:lstStyle/>
-          <a:p>
-            <a:pPr indent="0" marL="0">
-              <a:buNone/>
-            </a:pPr>
-            <a:r>
-              <a:rPr lang="en-US" sz="1400" dirty="0">
-                <a:solidFill>
-                  <a:srgbClr val="64748B"/>
-                </a:solidFill>
-                <a:latin typeface="Calibri" pitchFamily="34" charset="0"/>
-                <a:ea typeface="Calibri" pitchFamily="34" charset="-122"/>
-                <a:cs typeface="Calibri" pitchFamily="34" charset="-120"/>
-              </a:rPr>
-              <a:t>eventId</a:t>
-            </a:r>
-            <a:endParaRPr lang="en-US" sz="1400" dirty="0"/>
+            <a:off x="8503920" y="4983480"/>
+            <a:ext cx="3063240" cy="411480"/>
+          </a:xfrm>
+          <a:prstGeom prst="rect">
+            <a:avLst/>
+          </a:prstGeom>
+          <a:noFill/>
+          <a:ln/>
+        </p:spPr>
+        <p:txBody>
+          <a:bodyPr wrap="square" lIns="0" tIns="0" rIns="0" bIns="0" rtlCol="0" anchor="ctr"/>
+          <a:lstStyle/>
+          <a:p>
+            <a:pPr indent="0" marL="0">
+              <a:buNone/>
+            </a:pPr>
+            <a:r>
+              <a:rPr lang="en-US" sz="2600" b="1" dirty="0">
+                <a:solidFill>
+                  <a:srgbClr val="0C2340"/>
+                </a:solidFill>
+                <a:latin typeface="Calibri" pitchFamily="34" charset="0"/>
+                <a:ea typeface="Calibri" pitchFamily="34" charset="-122"/>
+                <a:cs typeface="Calibri" pitchFamily="34" charset="-120"/>
+              </a:rPr>
+              <a:t>txn-88</a:t>
+            </a:r>
+            <a:endParaRPr lang="en-US" sz="2600" dirty="0"/>
           </a:p>
         </p:txBody>
       </p:sp>
       <p:sp>
         <p:nvSpPr>
           <p:cNvPr id="27" name="Text 25"/>
-          <p:cNvSpPr/>
-          <p:nvPr/>
-        </p:nvSpPr>
-        <p:spPr>
-          <a:xfrm>
-            <a:off x="8503920" y="5120640"/>
-            <a:ext cx="3063240" cy="411480"/>
-          </a:xfrm>
-          <a:prstGeom prst="rect">
-            <a:avLst/>
-          </a:prstGeom>
-          <a:noFill/>
-          <a:ln/>
-        </p:spPr>
-        <p:txBody>
-          <a:bodyPr wrap="square" lIns="0" tIns="0" rIns="0" bIns="0" rtlCol="0" anchor="ctr"/>
-          <a:lstStyle/>
-          <a:p>
-            <a:pPr indent="0" marL="0">
-              <a:buNone/>
-            </a:pPr>
-            <a:r>
-              <a:rPr lang="en-US" sz="2600" b="1" dirty="0">
-                <a:solidFill>
-                  <a:srgbClr val="0C2340"/>
-                </a:solidFill>
-                <a:latin typeface="Calibri" pitchFamily="34" charset="0"/>
-                <a:ea typeface="Calibri" pitchFamily="34" charset="-122"/>
-                <a:cs typeface="Calibri" pitchFamily="34" charset="-120"/>
-              </a:rPr>
-              <a:t>txn-88</a:t>
-            </a:r>
-            <a:endParaRPr lang="en-US" sz="2600" dirty="0"/>
-          </a:p>
-        </p:txBody>
-      </p:sp>
-      <p:sp>
-        <p:nvSpPr>
-          <p:cNvPr id="28" name="Text 26"/>
           <p:cNvSpPr/>
           <p:nvPr/>
         </p:nvSpPr>
@@ -7466,7 +7892,7 @@
       </p:sp>
       <p:sp>
         <p:nvSpPr>
-          <p:cNvPr id="29" name="Text 27"/>
+          <p:cNvPr id="28" name="Text 26"/>
           <p:cNvSpPr/>
           <p:nvPr/>
         </p:nvSpPr>
@@ -7497,7 +7923,7 @@
                 <a:ea typeface="Calibri" pitchFamily="34" charset="-122"/>
                 <a:cs typeface="Calibri" pitchFamily="34" charset="-120"/>
               </a:rPr>
-              <a:t>5 / 12</a:t>
+              <a:t>5 / 15</a:t>
             </a:r>
             <a:endParaRPr lang="en-US" sz="1100" dirty="0"/>
           </a:p>
@@ -8174,7 +8600,7 @@
                 <a:ea typeface="Calibri" pitchFamily="34" charset="-122"/>
                 <a:cs typeface="Calibri" pitchFamily="34" charset="-120"/>
               </a:rPr>
-              <a:t>6 / 12</a:t>
+              <a:t>6 / 15</a:t>
             </a:r>
             <a:endParaRPr lang="en-US" sz="1100" dirty="0"/>
           </a:p>
@@ -8425,53 +8851,14 @@
       </p:sp>
       <p:sp>
         <p:nvSpPr>
-          <p:cNvPr id="9" name="Text 7"/>
-          <p:cNvSpPr/>
-          <p:nvPr/>
-        </p:nvSpPr>
-        <p:spPr>
-          <a:xfrm>
-            <a:off x="640080" y="2468880"/>
-            <a:ext cx="10972800" cy="365760"/>
-          </a:xfrm>
-          <a:prstGeom prst="rect">
-            <a:avLst/>
-          </a:prstGeom>
-          <a:noFill/>
-          <a:ln/>
-        </p:spPr>
-        <p:txBody>
-          <a:bodyPr wrap="square" lIns="0" tIns="0" rIns="0" bIns="0" rtlCol="0" anchor="ctr"/>
-          <a:lstStyle/>
-          <a:p>
-            <a:pPr indent="0" marL="0">
-              <a:buNone/>
-            </a:pPr>
-            <a:r>
-              <a:rPr lang="en-US" sz="1600" dirty="0">
-                <a:solidFill>
-                  <a:srgbClr val="64748B"/>
-                </a:solidFill>
-                <a:latin typeface="Calibri" pitchFamily="34" charset="0"/>
-                <a:ea typeface="Calibri" pitchFamily="34" charset="-122"/>
-                <a:cs typeface="Calibri" pitchFamily="34" charset="-120"/>
-              </a:rPr>
-              <a:t>Filters checked in priority order</a:t>
-            </a:r>
-            <a:endParaRPr lang="en-US" sz="1600" dirty="0"/>
-          </a:p>
-        </p:txBody>
-      </p:sp>
-      <p:sp>
-        <p:nvSpPr>
-          <p:cNvPr id="10" name="Shape 8"/>
-          <p:cNvSpPr/>
-          <p:nvPr/>
-        </p:nvSpPr>
-        <p:spPr>
-          <a:xfrm>
-            <a:off x="640080" y="3017520"/>
-            <a:ext cx="2148840" cy="2560320"/>
+          <p:cNvPr id="9" name="Shape 7"/>
+          <p:cNvSpPr/>
+          <p:nvPr/>
+        </p:nvSpPr>
+        <p:spPr>
+          <a:xfrm>
+            <a:off x="640080" y="2926080"/>
+            <a:ext cx="2148840" cy="2743200"/>
           </a:xfrm>
           <a:prstGeom prst="roundRect">
             <a:avLst>
@@ -8486,14 +8873,53 @@
       </p:sp>
       <p:sp>
         <p:nvSpPr>
+          <p:cNvPr id="10" name="Text 8"/>
+          <p:cNvSpPr/>
+          <p:nvPr/>
+        </p:nvSpPr>
+        <p:spPr>
+          <a:xfrm>
+            <a:off x="640080" y="3200400"/>
+            <a:ext cx="2148840" cy="457200"/>
+          </a:xfrm>
+          <a:prstGeom prst="rect">
+            <a:avLst/>
+          </a:prstGeom>
+          <a:noFill/>
+          <a:ln/>
+        </p:spPr>
+        <p:txBody>
+          <a:bodyPr wrap="square" lIns="0" tIns="0" rIns="0" bIns="0" rtlCol="0" anchor="ctr"/>
+          <a:lstStyle/>
+          <a:p>
+            <a:pPr algn="ctr" indent="0" marL="0">
+              <a:buNone/>
+            </a:pPr>
+            <a:r>
+              <a:rPr lang="en-US" sz="2200" b="1" dirty="0">
+                <a:solidFill>
+                  <a:srgbClr val="DB2777"/>
+                </a:solidFill>
+                <a:latin typeface="Calibri" pitchFamily="34" charset="0"/>
+                <a:ea typeface="Calibri" pitchFamily="34" charset="-122"/>
+                <a:cs typeface="Calibri" pitchFamily="34" charset="-120"/>
+              </a:rPr>
+              <a:t>1</a:t>
+            </a:r>
+            <a:endParaRPr lang="en-US" sz="2200" dirty="0"/>
+          </a:p>
+        </p:txBody>
+      </p:sp>
+      <p:sp>
+        <p:nvSpPr>
           <p:cNvPr id="11" name="Text 9"/>
           <p:cNvSpPr/>
           <p:nvPr/>
         </p:nvSpPr>
         <p:spPr>
           <a:xfrm>
-            <a:off x="640080" y="3291840"/>
-            <a:ext cx="2148840" cy="457200"/>
+            <a:off x="777240" y="3931920"/>
+            <a:ext cx="1874520" cy="1280160"/>
           </a:xfrm>
           <a:prstGeom prst="rect">
             <a:avLst/>
@@ -8509,40 +8935,18 @@
               <a:buNone/>
             </a:pPr>
             <a:r>
-              <a:rPr lang="en-US" sz="2200" b="1" dirty="0">
-                <a:solidFill>
-                  <a:srgbClr val="DB2777"/>
-                </a:solidFill>
-                <a:latin typeface="Calibri" pitchFamily="34" charset="0"/>
-                <a:ea typeface="Calibri" pitchFamily="34" charset="-122"/>
-                <a:cs typeface="Calibri" pitchFamily="34" charset="-120"/>
-              </a:rPr>
-              <a:t>1</a:t>
-            </a:r>
-            <a:endParaRPr lang="en-US" sz="2200" dirty="0"/>
-          </a:p>
-        </p:txBody>
-      </p:sp>
-      <p:sp>
-        <p:nvSpPr>
-          <p:cNvPr id="12" name="Text 10"/>
-          <p:cNvSpPr/>
-          <p:nvPr/>
-        </p:nvSpPr>
-        <p:spPr>
-          <a:xfrm>
-            <a:off x="777240" y="4023360"/>
-            <a:ext cx="1874520" cy="1188720"/>
-          </a:xfrm>
-          <a:prstGeom prst="rect">
-            <a:avLst/>
-          </a:prstGeom>
-          <a:noFill/>
-          <a:ln/>
-        </p:spPr>
-        <p:txBody>
-          <a:bodyPr wrap="square" lIns="0" tIns="0" rIns="0" bIns="0" rtlCol="0" anchor="ctr"/>
-          <a:lstStyle/>
+              <a:rPr lang="en-US" sz="1800" b="1" dirty="0">
+                <a:solidFill>
+                  <a:srgbClr val="0B1220"/>
+                </a:solidFill>
+                <a:latin typeface="Calibri" pitchFamily="34" charset="0"/>
+                <a:ea typeface="Calibri" pitchFamily="34" charset="-122"/>
+                <a:cs typeface="Calibri" pitchFamily="34" charset="-120"/>
+              </a:rPr>
+              <a:t>eventType</a:t>
+            </a:r>
+            <a:endParaRPr lang="en-US" sz="1800" dirty="0"/>
+          </a:p>
           <a:p>
             <a:pPr algn="ctr" indent="0" marL="0">
               <a:buNone/>
@@ -8556,7 +8960,7 @@
                 <a:ea typeface="Calibri" pitchFamily="34" charset="-122"/>
                 <a:cs typeface="Calibri" pitchFamily="34" charset="-120"/>
               </a:rPr>
-              <a:t>eventType = PURCHASE</a:t>
+              <a:t>= PURCHASE</a:t>
             </a:r>
             <a:endParaRPr lang="en-US" sz="1800" dirty="0"/>
           </a:p>
@@ -8564,14 +8968,14 @@
       </p:sp>
       <p:sp>
         <p:nvSpPr>
-          <p:cNvPr id="13" name="Shape 11"/>
-          <p:cNvSpPr/>
-          <p:nvPr/>
-        </p:nvSpPr>
-        <p:spPr>
-          <a:xfrm>
-            <a:off x="2926080" y="3017520"/>
-            <a:ext cx="2148840" cy="2560320"/>
+          <p:cNvPr id="12" name="Shape 10"/>
+          <p:cNvSpPr/>
+          <p:nvPr/>
+        </p:nvSpPr>
+        <p:spPr>
+          <a:xfrm>
+            <a:off x="2926080" y="2926080"/>
+            <a:ext cx="2148840" cy="2743200"/>
           </a:xfrm>
           <a:prstGeom prst="roundRect">
             <a:avLst>
@@ -8586,14 +8990,53 @@
       </p:sp>
       <p:sp>
         <p:nvSpPr>
+          <p:cNvPr id="13" name="Text 11"/>
+          <p:cNvSpPr/>
+          <p:nvPr/>
+        </p:nvSpPr>
+        <p:spPr>
+          <a:xfrm>
+            <a:off x="2926080" y="3200400"/>
+            <a:ext cx="2148840" cy="457200"/>
+          </a:xfrm>
+          <a:prstGeom prst="rect">
+            <a:avLst/>
+          </a:prstGeom>
+          <a:noFill/>
+          <a:ln/>
+        </p:spPr>
+        <p:txBody>
+          <a:bodyPr wrap="square" lIns="0" tIns="0" rIns="0" bIns="0" rtlCol="0" anchor="ctr"/>
+          <a:lstStyle/>
+          <a:p>
+            <a:pPr algn="ctr" indent="0" marL="0">
+              <a:buNone/>
+            </a:pPr>
+            <a:r>
+              <a:rPr lang="en-US" sz="2200" b="1" dirty="0">
+                <a:solidFill>
+                  <a:srgbClr val="DB2777"/>
+                </a:solidFill>
+                <a:latin typeface="Calibri" pitchFamily="34" charset="0"/>
+                <a:ea typeface="Calibri" pitchFamily="34" charset="-122"/>
+                <a:cs typeface="Calibri" pitchFamily="34" charset="-120"/>
+              </a:rPr>
+              <a:t>2</a:t>
+            </a:r>
+            <a:endParaRPr lang="en-US" sz="2200" dirty="0"/>
+          </a:p>
+        </p:txBody>
+      </p:sp>
+      <p:sp>
+        <p:nvSpPr>
           <p:cNvPr id="14" name="Text 12"/>
           <p:cNvSpPr/>
           <p:nvPr/>
         </p:nvSpPr>
         <p:spPr>
           <a:xfrm>
-            <a:off x="2926080" y="3291840"/>
-            <a:ext cx="2148840" cy="457200"/>
+            <a:off x="3063240" y="3931920"/>
+            <a:ext cx="1874520" cy="1280160"/>
           </a:xfrm>
           <a:prstGeom prst="rect">
             <a:avLst/>
@@ -8609,40 +9052,18 @@
               <a:buNone/>
             </a:pPr>
             <a:r>
-              <a:rPr lang="en-US" sz="2200" b="1" dirty="0">
-                <a:solidFill>
-                  <a:srgbClr val="DB2777"/>
-                </a:solidFill>
-                <a:latin typeface="Calibri" pitchFamily="34" charset="0"/>
-                <a:ea typeface="Calibri" pitchFamily="34" charset="-122"/>
-                <a:cs typeface="Calibri" pitchFamily="34" charset="-120"/>
-              </a:rPr>
-              <a:t>2</a:t>
-            </a:r>
-            <a:endParaRPr lang="en-US" sz="2200" dirty="0"/>
-          </a:p>
-        </p:txBody>
-      </p:sp>
-      <p:sp>
-        <p:nvSpPr>
-          <p:cNvPr id="15" name="Text 13"/>
-          <p:cNvSpPr/>
-          <p:nvPr/>
-        </p:nvSpPr>
-        <p:spPr>
-          <a:xfrm>
-            <a:off x="3063240" y="4023360"/>
-            <a:ext cx="1874520" cy="1188720"/>
-          </a:xfrm>
-          <a:prstGeom prst="rect">
-            <a:avLst/>
-          </a:prstGeom>
-          <a:noFill/>
-          <a:ln/>
-        </p:spPr>
-        <p:txBody>
-          <a:bodyPr wrap="square" lIns="0" tIns="0" rIns="0" bIns="0" rtlCol="0" anchor="ctr"/>
-          <a:lstStyle/>
+              <a:rPr lang="en-US" sz="1800" b="1" dirty="0">
+                <a:solidFill>
+                  <a:srgbClr val="0B1220"/>
+                </a:solidFill>
+                <a:latin typeface="Calibri" pitchFamily="34" charset="0"/>
+                <a:ea typeface="Calibri" pitchFamily="34" charset="-122"/>
+                <a:cs typeface="Calibri" pitchFamily="34" charset="-120"/>
+              </a:rPr>
+              <a:t>currency</a:t>
+            </a:r>
+            <a:endParaRPr lang="en-US" sz="1800" dirty="0"/>
+          </a:p>
           <a:p>
             <a:pPr algn="ctr" indent="0" marL="0">
               <a:buNone/>
@@ -8656,7 +9077,7 @@
                 <a:ea typeface="Calibri" pitchFamily="34" charset="-122"/>
                 <a:cs typeface="Calibri" pitchFamily="34" charset="-120"/>
               </a:rPr>
-              <a:t>currency = HKD</a:t>
+              <a:t>= HKD</a:t>
             </a:r>
             <a:endParaRPr lang="en-US" sz="1800" dirty="0"/>
           </a:p>
@@ -8664,14 +9085,14 @@
       </p:sp>
       <p:sp>
         <p:nvSpPr>
-          <p:cNvPr id="16" name="Shape 14"/>
-          <p:cNvSpPr/>
-          <p:nvPr/>
-        </p:nvSpPr>
-        <p:spPr>
-          <a:xfrm>
-            <a:off x="5212080" y="3017520"/>
-            <a:ext cx="2148840" cy="2560320"/>
+          <p:cNvPr id="15" name="Shape 13"/>
+          <p:cNvSpPr/>
+          <p:nvPr/>
+        </p:nvSpPr>
+        <p:spPr>
+          <a:xfrm>
+            <a:off x="5212080" y="2926080"/>
+            <a:ext cx="2148840" cy="2743200"/>
           </a:xfrm>
           <a:prstGeom prst="roundRect">
             <a:avLst>
@@ -8686,14 +9107,53 @@
       </p:sp>
       <p:sp>
         <p:nvSpPr>
+          <p:cNvPr id="16" name="Text 14"/>
+          <p:cNvSpPr/>
+          <p:nvPr/>
+        </p:nvSpPr>
+        <p:spPr>
+          <a:xfrm>
+            <a:off x="5212080" y="3200400"/>
+            <a:ext cx="2148840" cy="457200"/>
+          </a:xfrm>
+          <a:prstGeom prst="rect">
+            <a:avLst/>
+          </a:prstGeom>
+          <a:noFill/>
+          <a:ln/>
+        </p:spPr>
+        <p:txBody>
+          <a:bodyPr wrap="square" lIns="0" tIns="0" rIns="0" bIns="0" rtlCol="0" anchor="ctr"/>
+          <a:lstStyle/>
+          <a:p>
+            <a:pPr algn="ctr" indent="0" marL="0">
+              <a:buNone/>
+            </a:pPr>
+            <a:r>
+              <a:rPr lang="en-US" sz="2200" b="1" dirty="0">
+                <a:solidFill>
+                  <a:srgbClr val="DB2777"/>
+                </a:solidFill>
+                <a:latin typeface="Calibri" pitchFamily="34" charset="0"/>
+                <a:ea typeface="Calibri" pitchFamily="34" charset="-122"/>
+                <a:cs typeface="Calibri" pitchFamily="34" charset="-120"/>
+              </a:rPr>
+              <a:t>3</a:t>
+            </a:r>
+            <a:endParaRPr lang="en-US" sz="2200" dirty="0"/>
+          </a:p>
+        </p:txBody>
+      </p:sp>
+      <p:sp>
+        <p:nvSpPr>
           <p:cNvPr id="17" name="Text 15"/>
           <p:cNvSpPr/>
           <p:nvPr/>
         </p:nvSpPr>
         <p:spPr>
           <a:xfrm>
-            <a:off x="5212080" y="3291840"/>
-            <a:ext cx="2148840" cy="457200"/>
+            <a:off x="5349240" y="3931920"/>
+            <a:ext cx="1874520" cy="1280160"/>
           </a:xfrm>
           <a:prstGeom prst="rect">
             <a:avLst/>
@@ -8709,40 +9169,18 @@
               <a:buNone/>
             </a:pPr>
             <a:r>
-              <a:rPr lang="en-US" sz="2200" b="1" dirty="0">
-                <a:solidFill>
-                  <a:srgbClr val="DB2777"/>
-                </a:solidFill>
-                <a:latin typeface="Calibri" pitchFamily="34" charset="0"/>
-                <a:ea typeface="Calibri" pitchFamily="34" charset="-122"/>
-                <a:cs typeface="Calibri" pitchFamily="34" charset="-120"/>
-              </a:rPr>
-              <a:t>3</a:t>
-            </a:r>
-            <a:endParaRPr lang="en-US" sz="2200" dirty="0"/>
-          </a:p>
-        </p:txBody>
-      </p:sp>
-      <p:sp>
-        <p:nvSpPr>
-          <p:cNvPr id="18" name="Text 16"/>
-          <p:cNvSpPr/>
-          <p:nvPr/>
-        </p:nvSpPr>
-        <p:spPr>
-          <a:xfrm>
-            <a:off x="5349240" y="4023360"/>
-            <a:ext cx="1874520" cy="1188720"/>
-          </a:xfrm>
-          <a:prstGeom prst="rect">
-            <a:avLst/>
-          </a:prstGeom>
-          <a:noFill/>
-          <a:ln/>
-        </p:spPr>
-        <p:txBody>
-          <a:bodyPr wrap="square" lIns="0" tIns="0" rIns="0" bIns="0" rtlCol="0" anchor="ctr"/>
-          <a:lstStyle/>
+              <a:rPr lang="en-US" sz="1800" b="1" dirty="0">
+                <a:solidFill>
+                  <a:srgbClr val="0B1220"/>
+                </a:solidFill>
+                <a:latin typeface="Calibri" pitchFamily="34" charset="0"/>
+                <a:ea typeface="Calibri" pitchFamily="34" charset="-122"/>
+                <a:cs typeface="Calibri" pitchFamily="34" charset="-120"/>
+              </a:rPr>
+              <a:t>MCC</a:t>
+            </a:r>
+            <a:endParaRPr lang="en-US" sz="1800" dirty="0"/>
+          </a:p>
           <a:p>
             <a:pPr algn="ctr" indent="0" marL="0">
               <a:buNone/>
@@ -8756,7 +9194,7 @@
                 <a:ea typeface="Calibri" pitchFamily="34" charset="-122"/>
                 <a:cs typeface="Calibri" pitchFamily="34" charset="-120"/>
               </a:rPr>
-              <a:t>MCC = 5411</a:t>
+              <a:t>= 5411</a:t>
             </a:r>
             <a:endParaRPr lang="en-US" sz="1800" dirty="0"/>
           </a:p>
@@ -8764,14 +9202,14 @@
       </p:sp>
       <p:sp>
         <p:nvSpPr>
-          <p:cNvPr id="19" name="Shape 17"/>
-          <p:cNvSpPr/>
-          <p:nvPr/>
-        </p:nvSpPr>
-        <p:spPr>
-          <a:xfrm>
-            <a:off x="7498080" y="3017520"/>
-            <a:ext cx="2148840" cy="2560320"/>
+          <p:cNvPr id="18" name="Shape 16"/>
+          <p:cNvSpPr/>
+          <p:nvPr/>
+        </p:nvSpPr>
+        <p:spPr>
+          <a:xfrm>
+            <a:off x="7498080" y="2926080"/>
+            <a:ext cx="2148840" cy="2743200"/>
           </a:xfrm>
           <a:prstGeom prst="roundRect">
             <a:avLst>
@@ -8786,14 +9224,53 @@
       </p:sp>
       <p:sp>
         <p:nvSpPr>
+          <p:cNvPr id="19" name="Text 17"/>
+          <p:cNvSpPr/>
+          <p:nvPr/>
+        </p:nvSpPr>
+        <p:spPr>
+          <a:xfrm>
+            <a:off x="7498080" y="3200400"/>
+            <a:ext cx="2148840" cy="457200"/>
+          </a:xfrm>
+          <a:prstGeom prst="rect">
+            <a:avLst/>
+          </a:prstGeom>
+          <a:noFill/>
+          <a:ln/>
+        </p:spPr>
+        <p:txBody>
+          <a:bodyPr wrap="square" lIns="0" tIns="0" rIns="0" bIns="0" rtlCol="0" anchor="ctr"/>
+          <a:lstStyle/>
+          <a:p>
+            <a:pPr algn="ctr" indent="0" marL="0">
+              <a:buNone/>
+            </a:pPr>
+            <a:r>
+              <a:rPr lang="en-US" sz="2200" b="1" dirty="0">
+                <a:solidFill>
+                  <a:srgbClr val="DB2777"/>
+                </a:solidFill>
+                <a:latin typeface="Calibri" pitchFamily="34" charset="0"/>
+                <a:ea typeface="Calibri" pitchFamily="34" charset="-122"/>
+                <a:cs typeface="Calibri" pitchFamily="34" charset="-120"/>
+              </a:rPr>
+              <a:t>4</a:t>
+            </a:r>
+            <a:endParaRPr lang="en-US" sz="2200" dirty="0"/>
+          </a:p>
+        </p:txBody>
+      </p:sp>
+      <p:sp>
+        <p:nvSpPr>
           <p:cNvPr id="20" name="Text 18"/>
           <p:cNvSpPr/>
           <p:nvPr/>
         </p:nvSpPr>
         <p:spPr>
           <a:xfrm>
-            <a:off x="7498080" y="3291840"/>
-            <a:ext cx="2148840" cy="457200"/>
+            <a:off x="7635240" y="3931920"/>
+            <a:ext cx="1874520" cy="1280160"/>
           </a:xfrm>
           <a:prstGeom prst="rect">
             <a:avLst/>
@@ -8809,40 +9286,18 @@
               <a:buNone/>
             </a:pPr>
             <a:r>
-              <a:rPr lang="en-US" sz="2200" b="1" dirty="0">
-                <a:solidFill>
-                  <a:srgbClr val="DB2777"/>
-                </a:solidFill>
-                <a:latin typeface="Calibri" pitchFamily="34" charset="0"/>
-                <a:ea typeface="Calibri" pitchFamily="34" charset="-122"/>
-                <a:cs typeface="Calibri" pitchFamily="34" charset="-120"/>
-              </a:rPr>
-              <a:t>4</a:t>
-            </a:r>
-            <a:endParaRPr lang="en-US" sz="2200" dirty="0"/>
-          </a:p>
-        </p:txBody>
-      </p:sp>
-      <p:sp>
-        <p:nvSpPr>
-          <p:cNvPr id="21" name="Text 19"/>
-          <p:cNvSpPr/>
-          <p:nvPr/>
-        </p:nvSpPr>
-        <p:spPr>
-          <a:xfrm>
-            <a:off x="7635240" y="4023360"/>
-            <a:ext cx="1874520" cy="1188720"/>
-          </a:xfrm>
-          <a:prstGeom prst="rect">
-            <a:avLst/>
-          </a:prstGeom>
-          <a:noFill/>
-          <a:ln/>
-        </p:spPr>
-        <p:txBody>
-          <a:bodyPr wrap="square" lIns="0" tIns="0" rIns="0" bIns="0" rtlCol="0" anchor="ctr"/>
-          <a:lstStyle/>
+              <a:rPr lang="en-US" sz="1800" b="1" dirty="0">
+                <a:solidFill>
+                  <a:srgbClr val="0B1220"/>
+                </a:solidFill>
+                <a:latin typeface="Calibri" pitchFamily="34" charset="0"/>
+                <a:ea typeface="Calibri" pitchFamily="34" charset="-122"/>
+                <a:cs typeface="Calibri" pitchFamily="34" charset="-120"/>
+              </a:rPr>
+              <a:t>amount</a:t>
+            </a:r>
+            <a:endParaRPr lang="en-US" sz="1800" dirty="0"/>
+          </a:p>
           <a:p>
             <a:pPr algn="ctr" indent="0" marL="0">
               <a:buNone/>
@@ -8856,7 +9311,7 @@
                 <a:ea typeface="Calibri" pitchFamily="34" charset="-122"/>
                 <a:cs typeface="Calibri" pitchFamily="34" charset="-120"/>
               </a:rPr>
-              <a:t>amount ≥ min</a:t>
+              <a:t>≥ min</a:t>
             </a:r>
             <a:endParaRPr lang="en-US" sz="1800" dirty="0"/>
           </a:p>
@@ -8864,14 +9319,14 @@
       </p:sp>
       <p:sp>
         <p:nvSpPr>
-          <p:cNvPr id="22" name="Shape 20"/>
-          <p:cNvSpPr/>
-          <p:nvPr/>
-        </p:nvSpPr>
-        <p:spPr>
-          <a:xfrm>
-            <a:off x="9784080" y="3017520"/>
-            <a:ext cx="2148840" cy="2560320"/>
+          <p:cNvPr id="21" name="Shape 19"/>
+          <p:cNvSpPr/>
+          <p:nvPr/>
+        </p:nvSpPr>
+        <p:spPr>
+          <a:xfrm>
+            <a:off x="9784080" y="2926080"/>
+            <a:ext cx="2148840" cy="2743200"/>
           </a:xfrm>
           <a:prstGeom prst="roundRect">
             <a:avLst>
@@ -8886,14 +9341,53 @@
       </p:sp>
       <p:sp>
         <p:nvSpPr>
+          <p:cNvPr id="22" name="Text 20"/>
+          <p:cNvSpPr/>
+          <p:nvPr/>
+        </p:nvSpPr>
+        <p:spPr>
+          <a:xfrm>
+            <a:off x="9784080" y="3200400"/>
+            <a:ext cx="2148840" cy="457200"/>
+          </a:xfrm>
+          <a:prstGeom prst="rect">
+            <a:avLst/>
+          </a:prstGeom>
+          <a:noFill/>
+          <a:ln/>
+        </p:spPr>
+        <p:txBody>
+          <a:bodyPr wrap="square" lIns="0" tIns="0" rIns="0" bIns="0" rtlCol="0" anchor="ctr"/>
+          <a:lstStyle/>
+          <a:p>
+            <a:pPr algn="ctr" indent="0" marL="0">
+              <a:buNone/>
+            </a:pPr>
+            <a:r>
+              <a:rPr lang="en-US" sz="2200" b="1" dirty="0">
+                <a:solidFill>
+                  <a:srgbClr val="DB2777"/>
+                </a:solidFill>
+                <a:latin typeface="Calibri" pitchFamily="34" charset="0"/>
+                <a:ea typeface="Calibri" pitchFamily="34" charset="-122"/>
+                <a:cs typeface="Calibri" pitchFamily="34" charset="-120"/>
+              </a:rPr>
+              <a:t>5</a:t>
+            </a:r>
+            <a:endParaRPr lang="en-US" sz="2200" dirty="0"/>
+          </a:p>
+        </p:txBody>
+      </p:sp>
+      <p:sp>
+        <p:nvSpPr>
           <p:cNvPr id="23" name="Text 21"/>
           <p:cNvSpPr/>
           <p:nvPr/>
         </p:nvSpPr>
         <p:spPr>
           <a:xfrm>
-            <a:off x="9784080" y="3291840"/>
-            <a:ext cx="2148840" cy="457200"/>
+            <a:off x="9921240" y="3931920"/>
+            <a:ext cx="1874520" cy="1280160"/>
           </a:xfrm>
           <a:prstGeom prst="rect">
             <a:avLst/>
@@ -8909,62 +9403,40 @@
               <a:buNone/>
             </a:pPr>
             <a:r>
-              <a:rPr lang="en-US" sz="2200" b="1" dirty="0">
-                <a:solidFill>
-                  <a:srgbClr val="DB2777"/>
-                </a:solidFill>
-                <a:latin typeface="Calibri" pitchFamily="34" charset="0"/>
-                <a:ea typeface="Calibri" pitchFamily="34" charset="-122"/>
-                <a:cs typeface="Calibri" pitchFamily="34" charset="-120"/>
-              </a:rPr>
-              <a:t>5</a:t>
-            </a:r>
-            <a:endParaRPr lang="en-US" sz="2200" dirty="0"/>
+              <a:rPr lang="en-US" sz="1800" b="1" dirty="0">
+                <a:solidFill>
+                  <a:srgbClr val="0B1220"/>
+                </a:solidFill>
+                <a:latin typeface="Calibri" pitchFamily="34" charset="0"/>
+                <a:ea typeface="Calibri" pitchFamily="34" charset="-122"/>
+                <a:cs typeface="Calibri" pitchFamily="34" charset="-120"/>
+              </a:rPr>
+              <a:t>age within</a:t>
+            </a:r>
+            <a:endParaRPr lang="en-US" sz="1800" dirty="0"/>
+          </a:p>
+          <a:p>
+            <a:pPr algn="ctr" indent="0" marL="0">
+              <a:buNone/>
+            </a:pPr>
+            <a:r>
+              <a:rPr lang="en-US" sz="1800" b="1" dirty="0">
+                <a:solidFill>
+                  <a:srgbClr val="0B1220"/>
+                </a:solidFill>
+                <a:latin typeface="Calibri" pitchFamily="34" charset="0"/>
+                <a:ea typeface="Calibri" pitchFamily="34" charset="-122"/>
+                <a:cs typeface="Calibri" pitchFamily="34" charset="-120"/>
+              </a:rPr>
+              <a:t>max days</a:t>
+            </a:r>
+            <a:endParaRPr lang="en-US" sz="1800" dirty="0"/>
           </a:p>
         </p:txBody>
       </p:sp>
       <p:sp>
         <p:nvSpPr>
           <p:cNvPr id="24" name="Text 22"/>
-          <p:cNvSpPr/>
-          <p:nvPr/>
-        </p:nvSpPr>
-        <p:spPr>
-          <a:xfrm>
-            <a:off x="9921240" y="4023360"/>
-            <a:ext cx="1874520" cy="1188720"/>
-          </a:xfrm>
-          <a:prstGeom prst="rect">
-            <a:avLst/>
-          </a:prstGeom>
-          <a:noFill/>
-          <a:ln/>
-        </p:spPr>
-        <p:txBody>
-          <a:bodyPr wrap="square" lIns="0" tIns="0" rIns="0" bIns="0" rtlCol="0" anchor="ctr"/>
-          <a:lstStyle/>
-          <a:p>
-            <a:pPr algn="ctr" indent="0" marL="0">
-              <a:buNone/>
-            </a:pPr>
-            <a:r>
-              <a:rPr lang="en-US" sz="1800" b="1" dirty="0">
-                <a:solidFill>
-                  <a:srgbClr val="0B1220"/>
-                </a:solidFill>
-                <a:latin typeface="Calibri" pitchFamily="34" charset="0"/>
-                <a:ea typeface="Calibri" pitchFamily="34" charset="-122"/>
-                <a:cs typeface="Calibri" pitchFamily="34" charset="-120"/>
-              </a:rPr>
-              <a:t>age within max days</a:t>
-            </a:r>
-            <a:endParaRPr lang="en-US" sz="1800" dirty="0"/>
-          </a:p>
-        </p:txBody>
-      </p:sp>
-      <p:sp>
-        <p:nvSpPr>
-          <p:cNvPr id="25" name="Text 23"/>
           <p:cNvSpPr/>
           <p:nvPr/>
         </p:nvSpPr>
@@ -9003,7 +9475,7 @@
       </p:sp>
       <p:sp>
         <p:nvSpPr>
-          <p:cNvPr id="26" name="Text 24"/>
+          <p:cNvPr id="25" name="Text 23"/>
           <p:cNvSpPr/>
           <p:nvPr/>
         </p:nvSpPr>
@@ -9034,7 +9506,7 @@
                 <a:ea typeface="Calibri" pitchFamily="34" charset="-122"/>
                 <a:cs typeface="Calibri" pitchFamily="34" charset="-120"/>
               </a:rPr>
-              <a:t>7 / 12</a:t>
+              <a:t>7 / 15</a:t>
             </a:r>
             <a:endParaRPr lang="en-US" sz="1100" dirty="0"/>
           </a:p>
@@ -9133,7 +9605,7 @@
         <p:spPr>
           <a:xfrm>
             <a:off x="640080" y="1554480"/>
-            <a:ext cx="10972800" cy="548640"/>
+            <a:ext cx="10972800" cy="457200"/>
           </a:xfrm>
           <a:prstGeom prst="rect">
             <a:avLst/>
@@ -10190,7 +10662,7 @@
                 <a:ea typeface="Calibri" pitchFamily="34" charset="-122"/>
                 <a:cs typeface="Calibri" pitchFamily="34" charset="-120"/>
               </a:rPr>
-              <a:t>9 / 12</a:t>
+              <a:t>9 / 15</a:t>
             </a:r>
             <a:endParaRPr lang="en-US" sz="1100" dirty="0"/>
           </a:p>
